--- a/AI_Workshop_Presentation.pptx
+++ b/AI_Workshop_Presentation.pptx
@@ -3127,7 +3127,7 @@
     <p:bg>
       <p:bgPr>
         <a:solidFill>
-          <a:srgbClr val="6C35DE"/>
+          <a:srgbClr val="00244E"/>
         </a:solidFill>
         <a:effectLst/>
       </p:bgPr>
@@ -3154,7 +3154,7 @@
             <a:avLst/>
           </a:prstGeom>
           <a:solidFill>
-            <a:srgbClr val="228BE6"/>
+            <a:srgbClr val="009DEA"/>
           </a:solidFill>
           <a:ln>
             <a:noFill/>
@@ -3197,7 +3197,7 @@
             <a:avLst/>
           </a:prstGeom>
           <a:solidFill>
-            <a:srgbClr val="FFD600"/>
+            <a:srgbClr val="FDB913"/>
           </a:solidFill>
           <a:ln>
             <a:noFill/>
@@ -3253,6 +3253,7 @@
                 <a:solidFill>
                   <a:srgbClr val="FFFFFF"/>
                 </a:solidFill>
+                <a:latin typeface="Franklin Gothic Medium Cond"/>
               </a:rPr>
               <a:t>AI as Your</a:t>
             </a:r>
@@ -3285,8 +3286,9 @@
             <a:r>
               <a:rPr sz="5600" b="1" i="0">
                 <a:solidFill>
-                  <a:srgbClr val="FFD600"/>
-                </a:solidFill>
+                  <a:srgbClr val="FDB913"/>
+                </a:solidFill>
+                <a:latin typeface="Franklin Gothic Medium Cond"/>
               </a:rPr>
               <a:t>Collaborator</a:t>
             </a:r>
@@ -3321,6 +3323,7 @@
                 <a:solidFill>
                   <a:srgbClr val="FFFFFF"/>
                 </a:solidFill>
+                <a:latin typeface="Franklin Gothic Medium Cond"/>
               </a:rPr>
               <a:t>An Interactive Workshop for International College Students</a:t>
             </a:r>
@@ -3342,7 +3345,7 @@
             <a:avLst/>
           </a:prstGeom>
           <a:solidFill>
-            <a:srgbClr val="FFD600"/>
+            <a:srgbClr val="FDB913"/>
           </a:solidFill>
           <a:ln>
             <a:noFill/>
@@ -3396,8 +3399,9 @@
             <a:r>
               <a:rPr sz="1700" b="0" i="0">
                 <a:solidFill>
-                  <a:srgbClr val="E8ECF8"/>
-                </a:solidFill>
+                  <a:srgbClr val="F0F4FA"/>
+                </a:solidFill>
+                <a:latin typeface="Franklin Gothic Medium Cond"/>
               </a:rPr>
               <a:t>Basics  ·  Mindset Shift  ·  Prompting Lab  ·  Evaluation  ·  Responsible Use</a:t>
             </a:r>
@@ -3430,8 +3434,9 @@
             <a:r>
               <a:rPr sz="1500" b="0" i="1">
                 <a:solidFill>
-                  <a:srgbClr val="E8ECF8"/>
-                </a:solidFill>
+                  <a:srgbClr val="F0F4FA"/>
+                </a:solidFill>
+                <a:latin typeface="Franklin Gothic Medium Cond"/>
               </a:rPr>
               <a:t>Facilitator Guide  |  Workshop Version 1.0</a:t>
             </a:r>
@@ -3479,7 +3484,7 @@
             <a:avLst/>
           </a:prstGeom>
           <a:solidFill>
-            <a:srgbClr val="E91E8C"/>
+            <a:srgbClr val="E28E03"/>
           </a:solidFill>
           <a:ln>
             <a:noFill/>
@@ -3535,6 +3540,7 @@
                 <a:solidFill>
                   <a:srgbClr val="FFFFFF"/>
                 </a:solidFill>
+                <a:latin typeface="Franklin Gothic Medium Cond"/>
               </a:rPr>
               <a:t>Hallucination Example</a:t>
             </a:r>
@@ -3567,8 +3573,9 @@
             <a:r>
               <a:rPr sz="1800" b="0" i="1">
                 <a:solidFill>
-                  <a:srgbClr val="E8ECF8"/>
-                </a:solidFill>
+                  <a:srgbClr val="F0F4FA"/>
+                </a:solidFill>
+                <a:latin typeface="Franklin Gothic Medium Cond"/>
               </a:rPr>
               <a:t>This is what a hallucination looks like — confident but false</a:t>
             </a:r>
@@ -3590,7 +3597,7 @@
             <a:avLst/>
           </a:prstGeom>
           <a:solidFill>
-            <a:srgbClr val="228BE6"/>
+            <a:srgbClr val="009DEA"/>
           </a:solidFill>
           <a:ln>
             <a:noFill/>
@@ -3646,6 +3653,7 @@
                 <a:solidFill>
                   <a:srgbClr val="FFFFFF"/>
                 </a:solidFill>
+                <a:latin typeface="Franklin Gothic Medium Cond"/>
               </a:rPr>
               <a:t>PROMPT</a:t>
             </a:r>
@@ -3667,7 +3675,7 @@
             <a:avLst/>
           </a:prstGeom>
           <a:solidFill>
-            <a:srgbClr val="E8ECF8"/>
+            <a:srgbClr val="F0F4FA"/>
           </a:solidFill>
           <a:ln>
             <a:noFill/>
@@ -3720,8 +3728,9 @@
             <a:r>
               <a:rPr sz="1900" i="1">
                 <a:solidFill>
-                  <a:srgbClr val="6C35DE"/>
-                </a:solidFill>
+                  <a:srgbClr val="00244E"/>
+                </a:solidFill>
+                <a:latin typeface="Franklin Gothic Medium Cond"/>
               </a:rPr>
               <a:t>Who wrote the novel 'The Language of Seasons' published in 2019?</a:t>
             </a:r>
@@ -3743,7 +3752,7 @@
             <a:avLst/>
           </a:prstGeom>
           <a:solidFill>
-            <a:srgbClr val="00BFA5"/>
+            <a:srgbClr val="0A3370"/>
           </a:solidFill>
           <a:ln>
             <a:noFill/>
@@ -3799,6 +3808,7 @@
                 <a:solidFill>
                   <a:srgbClr val="FFFFFF"/>
                 </a:solidFill>
+                <a:latin typeface="Franklin Gothic Medium Cond"/>
               </a:rPr>
               <a:t>AI OUTPUT</a:t>
             </a:r>
@@ -3820,7 +3830,7 @@
             <a:avLst/>
           </a:prstGeom>
           <a:solidFill>
-            <a:srgbClr val="E8ECF8"/>
+            <a:srgbClr val="F0F4FA"/>
           </a:solidFill>
           <a:ln>
             <a:noFill/>
@@ -3873,7 +3883,7 @@
             <a:r>
               <a:rPr sz="1800">
                 <a:solidFill>
-                  <a:srgbClr val="444466"/>
+                  <a:srgbClr val="0A3370"/>
                 </a:solidFill>
               </a:rPr>
               <a:t>The novel 'The Language of Seasons' was written by Maria Chen and published by Penguin Random House in April 2019. It won the Booker Prize shortlist that year.
@@ -3896,7 +3906,7 @@
     <p:bg>
       <p:bgPr>
         <a:solidFill>
-          <a:srgbClr val="00BFA5"/>
+          <a:srgbClr val="0A3370"/>
         </a:solidFill>
         <a:effectLst/>
       </p:bgPr>
@@ -3936,6 +3946,7 @@
                 <a:solidFill>
                   <a:srgbClr val="FFFFFF"/>
                 </a:solidFill>
+                <a:latin typeface="Franklin Gothic Medium Cond"/>
               </a:rPr>
               <a:t>2</a:t>
             </a:r>
@@ -3957,7 +3968,7 @@
             <a:avLst/>
           </a:prstGeom>
           <a:solidFill>
-            <a:srgbClr val="FFD600"/>
+            <a:srgbClr val="FDB913"/>
           </a:solidFill>
           <a:ln>
             <a:noFill/>
@@ -4011,8 +4022,9 @@
             <a:r>
               <a:rPr sz="1800" b="1" i="1">
                 <a:solidFill>
-                  <a:srgbClr val="FFD600"/>
-                </a:solidFill>
+                  <a:srgbClr val="FDB913"/>
+                </a:solidFill>
+                <a:latin typeface="Franklin Gothic Medium Cond"/>
               </a:rPr>
               <a:t>SECTION 2</a:t>
             </a:r>
@@ -4047,6 +4059,7 @@
                 <a:solidFill>
                   <a:srgbClr val="FFFFFF"/>
                 </a:solidFill>
+                <a:latin typeface="Franklin Gothic Medium Cond"/>
               </a:rPr>
               <a:t>Mindset Shift: Search → Collaboration</a:t>
             </a:r>
@@ -4079,8 +4092,9 @@
             <a:r>
               <a:rPr sz="2200" b="0" i="1">
                 <a:solidFill>
-                  <a:srgbClr val="E8ECF8"/>
-                </a:solidFill>
+                  <a:srgbClr val="F0F4FA"/>
+                </a:solidFill>
+                <a:latin typeface="Franklin Gothic Medium Cond"/>
               </a:rPr>
               <a:t>Change how you talk to AI and transform what you get back</a:t>
             </a:r>
@@ -4128,7 +4142,7 @@
             <a:avLst/>
           </a:prstGeom>
           <a:solidFill>
-            <a:srgbClr val="E91E8C"/>
+            <a:srgbClr val="E28E03"/>
           </a:solidFill>
           <a:ln>
             <a:noFill/>
@@ -4184,6 +4198,7 @@
                 <a:solidFill>
                   <a:srgbClr val="FFFFFF"/>
                 </a:solidFill>
+                <a:latin typeface="Franklin Gothic Medium Cond"/>
               </a:rPr>
               <a:t>The 'Search Engine' Mindset</a:t>
             </a:r>
@@ -4216,8 +4231,9 @@
             <a:r>
               <a:rPr sz="1800" b="0" i="1">
                 <a:solidFill>
-                  <a:srgbClr val="E8ECF8"/>
-                </a:solidFill>
+                  <a:srgbClr val="F0F4FA"/>
+                </a:solidFill>
+                <a:latin typeface="Franklin Gothic Medium Cond"/>
               </a:rPr>
               <a:t>Short, keyword-style queries — passive information retrieval</a:t>
             </a:r>
@@ -4254,8 +4270,9 @@
             <a:r>
               <a:rPr sz="2100">
                 <a:solidFill>
-                  <a:srgbClr val="E91E8C"/>
-                </a:solidFill>
+                  <a:srgbClr val="E28E03"/>
+                </a:solidFill>
+                <a:latin typeface="Franklin Gothic Medium Cond"/>
               </a:rPr>
               <a:t>🔎  "What is climate change?"</a:t>
             </a:r>
@@ -4269,8 +4286,9 @@
             <a:r>
               <a:rPr sz="2100">
                 <a:solidFill>
-                  <a:srgbClr val="E91E8C"/>
-                </a:solidFill>
+                  <a:srgbClr val="E28E03"/>
+                </a:solidFill>
+                <a:latin typeface="Franklin Gothic Medium Cond"/>
               </a:rPr>
               <a:t>🔎  "Causes of World War II"</a:t>
             </a:r>
@@ -4284,8 +4302,9 @@
             <a:r>
               <a:rPr sz="2100">
                 <a:solidFill>
-                  <a:srgbClr val="E91E8C"/>
-                </a:solidFill>
+                  <a:srgbClr val="E28E03"/>
+                </a:solidFill>
+                <a:latin typeface="Franklin Gothic Medium Cond"/>
               </a:rPr>
               <a:t>🔎  "Healthy foods"</a:t>
             </a:r>
@@ -4299,8 +4318,9 @@
             <a:r>
               <a:rPr sz="2100">
                 <a:solidFill>
-                  <a:srgbClr val="E91E8C"/>
-                </a:solidFill>
+                  <a:srgbClr val="E28E03"/>
+                </a:solidFill>
+                <a:latin typeface="Franklin Gothic Medium Cond"/>
               </a:rPr>
               <a:t>🔎  "Grammar rules English"</a:t>
             </a:r>
@@ -4314,8 +4334,9 @@
             <a:r>
               <a:rPr sz="2100">
                 <a:solidFill>
-                  <a:srgbClr val="E91E8C"/>
-                </a:solidFill>
+                  <a:srgbClr val="E28E03"/>
+                </a:solidFill>
+                <a:latin typeface="Franklin Gothic Medium Cond"/>
               </a:rPr>
               <a:t>🔎  "Essay about leadership"</a:t>
             </a:r>
@@ -4329,8 +4350,9 @@
             <a:r>
               <a:rPr sz="2100">
                 <a:solidFill>
-                  <a:srgbClr val="E91E8C"/>
-                </a:solidFill>
+                  <a:srgbClr val="E28E03"/>
+                </a:solidFill>
+                <a:latin typeface="Franklin Gothic Medium Cond"/>
               </a:rPr>
               <a:t>🔎  "Python tutorial"</a:t>
             </a:r>
@@ -4344,8 +4366,9 @@
             <a:r>
               <a:rPr sz="2100">
                 <a:solidFill>
-                  <a:srgbClr val="E91E8C"/>
-                </a:solidFill>
+                  <a:srgbClr val="E28E03"/>
+                </a:solidFill>
+                <a:latin typeface="Franklin Gothic Medium Cond"/>
               </a:rPr>
               <a:t>🔎  "Symptoms of anxiety"</a:t>
             </a:r>
@@ -4393,7 +4416,7 @@
             <a:avLst/>
           </a:prstGeom>
           <a:solidFill>
-            <a:srgbClr val="00BFA5"/>
+            <a:srgbClr val="0A3370"/>
           </a:solidFill>
           <a:ln>
             <a:noFill/>
@@ -4449,6 +4472,7 @@
                 <a:solidFill>
                   <a:srgbClr val="FFFFFF"/>
                 </a:solidFill>
+                <a:latin typeface="Franklin Gothic Medium Cond"/>
               </a:rPr>
               <a:t>The 'Collaborator' Mindset</a:t>
             </a:r>
@@ -4481,8 +4505,9 @@
             <a:r>
               <a:rPr sz="1800" b="0" i="1">
                 <a:solidFill>
-                  <a:srgbClr val="E8ECF8"/>
-                </a:solidFill>
+                  <a:srgbClr val="F0F4FA"/>
+                </a:solidFill>
+                <a:latin typeface="Franklin Gothic Medium Cond"/>
               </a:rPr>
               <a:t>Specific, contextual, interactive — active collaboration</a:t>
             </a:r>
@@ -4519,8 +4544,9 @@
             <a:r>
               <a:rPr sz="2100">
                 <a:solidFill>
-                  <a:srgbClr val="00BFA5"/>
-                </a:solidFill>
+                  <a:srgbClr val="0A3370"/>
+                </a:solidFill>
+                <a:latin typeface="Franklin Gothic Medium Cond"/>
               </a:rPr>
               <a:t>🤝  "Act as an environmental scientist. Explain climate change to a first-year student in 3 bullet points."</a:t>
             </a:r>
@@ -4534,8 +4560,9 @@
             <a:r>
               <a:rPr sz="2100">
                 <a:solidFill>
-                  <a:srgbClr val="00BFA5"/>
-                </a:solidFill>
+                  <a:srgbClr val="0A3370"/>
+                </a:solidFill>
+                <a:latin typeface="Franklin Gothic Medium Cond"/>
               </a:rPr>
               <a:t>🤝  "Help me understand the main causes of WWI vs. WWII. Ask me questions first to check my knowledge gaps."</a:t>
             </a:r>
@@ -4549,8 +4576,9 @@
             <a:r>
               <a:rPr sz="2100">
                 <a:solidFill>
-                  <a:srgbClr val="00BFA5"/>
-                </a:solidFill>
+                  <a:srgbClr val="0A3370"/>
+                </a:solidFill>
+                <a:latin typeface="Franklin Gothic Medium Cond"/>
               </a:rPr>
               <a:t>🤝  "Give me a weekly meal plan as a table. I'm vegetarian and on a budget."</a:t>
             </a:r>
@@ -4564,8 +4592,9 @@
             <a:r>
               <a:rPr sz="2100">
                 <a:solidFill>
-                  <a:srgbClr val="00BFA5"/>
-                </a:solidFill>
+                  <a:srgbClr val="0A3370"/>
+                </a:solidFill>
+                <a:latin typeface="Franklin Gothic Medium Cond"/>
               </a:rPr>
               <a:t>🤝  "I'm writing an essay on leadership. Suggest 5 thesis angles and explain the pros of each."</a:t>
             </a:r>
@@ -4579,8 +4608,9 @@
             <a:r>
               <a:rPr sz="2100">
                 <a:solidFill>
-                  <a:srgbClr val="00BFA5"/>
-                </a:solidFill>
+                  <a:srgbClr val="0A3370"/>
+                </a:solidFill>
+                <a:latin typeface="Franklin Gothic Medium Cond"/>
               </a:rPr>
               <a:t>🤝  "I'm a beginner. Teach me Python step-by-step, starting with variables. Check my understanding after each step."</a:t>
             </a:r>
@@ -4628,7 +4658,7 @@
             <a:avLst/>
           </a:prstGeom>
           <a:solidFill>
-            <a:srgbClr val="6C35DE"/>
+            <a:srgbClr val="00244E"/>
           </a:solidFill>
           <a:ln>
             <a:noFill/>
@@ -4684,6 +4714,7 @@
                 <a:solidFill>
                   <a:srgbClr val="FFFFFF"/>
                 </a:solidFill>
+                <a:latin typeface="Franklin Gothic Medium Cond"/>
               </a:rPr>
               <a:t>Search vs. Collaboration — Side by Side</a:t>
             </a:r>
@@ -4716,8 +4747,9 @@
             <a:r>
               <a:rPr sz="1800" b="0" i="1">
                 <a:solidFill>
-                  <a:srgbClr val="E8ECF8"/>
-                </a:solidFill>
+                  <a:srgbClr val="F0F4FA"/>
+                </a:solidFill>
+                <a:latin typeface="Franklin Gothic Medium Cond"/>
               </a:rPr>
               <a:t>Which mindset produces better results?</a:t>
             </a:r>
@@ -4739,7 +4771,7 @@
             <a:avLst/>
           </a:prstGeom>
           <a:solidFill>
-            <a:srgbClr val="E91E8C"/>
+            <a:srgbClr val="E28E03"/>
           </a:solidFill>
           <a:ln>
             <a:noFill/>
@@ -4795,6 +4827,7 @@
                 <a:solidFill>
                   <a:srgbClr val="FFFFFF"/>
                 </a:solidFill>
+                <a:latin typeface="Franklin Gothic Medium Cond"/>
               </a:rPr>
               <a:t>🔎  Search Mindset</a:t>
             </a:r>
@@ -4833,6 +4866,7 @@
                 <a:solidFill>
                   <a:srgbClr val="FFFFFF"/>
                 </a:solidFill>
+                <a:latin typeface="Franklin Gothic Medium Cond"/>
               </a:rPr>
               <a:t>▸  Short, keyword queries</a:t>
             </a:r>
@@ -4848,6 +4882,7 @@
                 <a:solidFill>
                   <a:srgbClr val="FFFFFF"/>
                 </a:solidFill>
+                <a:latin typeface="Franklin Gothic Medium Cond"/>
               </a:rPr>
               <a:t>▸  Expects one correct answer</a:t>
             </a:r>
@@ -4863,6 +4898,7 @@
                 <a:solidFill>
                   <a:srgbClr val="FFFFFF"/>
                 </a:solidFill>
+                <a:latin typeface="Franklin Gothic Medium Cond"/>
               </a:rPr>
               <a:t>▸  Passive — reads and accepts</a:t>
             </a:r>
@@ -4878,6 +4914,7 @@
                 <a:solidFill>
                   <a:srgbClr val="FFFFFF"/>
                 </a:solidFill>
+                <a:latin typeface="Franklin Gothic Medium Cond"/>
               </a:rPr>
               <a:t>▸  No follow-up or iteration</a:t>
             </a:r>
@@ -4893,6 +4930,7 @@
                 <a:solidFill>
                   <a:srgbClr val="FFFFFF"/>
                 </a:solidFill>
+                <a:latin typeface="Franklin Gothic Medium Cond"/>
               </a:rPr>
               <a:t>▸  Treats AI like a dictionary</a:t>
             </a:r>
@@ -4908,6 +4946,7 @@
                 <a:solidFill>
                   <a:srgbClr val="FFFFFF"/>
                 </a:solidFill>
+                <a:latin typeface="Franklin Gothic Medium Cond"/>
               </a:rPr>
               <a:t>▸  Frustrated when answer is vague</a:t>
             </a:r>
@@ -4929,7 +4968,7 @@
             <a:avLst/>
           </a:prstGeom>
           <a:solidFill>
-            <a:srgbClr val="00BFA5"/>
+            <a:srgbClr val="0A3370"/>
           </a:solidFill>
           <a:ln>
             <a:noFill/>
@@ -4985,6 +5024,7 @@
                 <a:solidFill>
                   <a:srgbClr val="FFFFFF"/>
                 </a:solidFill>
+                <a:latin typeface="Franklin Gothic Medium Cond"/>
               </a:rPr>
               <a:t>🤝  Collaborator Mindset</a:t>
             </a:r>
@@ -5023,6 +5063,7 @@
                 <a:solidFill>
                   <a:srgbClr val="FFFFFF"/>
                 </a:solidFill>
+                <a:latin typeface="Franklin Gothic Medium Cond"/>
               </a:rPr>
               <a:t>▸  Context-rich, specific prompts</a:t>
             </a:r>
@@ -5038,6 +5079,7 @@
                 <a:solidFill>
                   <a:srgbClr val="FFFFFF"/>
                 </a:solidFill>
+                <a:latin typeface="Franklin Gothic Medium Cond"/>
               </a:rPr>
               <a:t>▸  Expects a starting point to refine</a:t>
             </a:r>
@@ -5053,6 +5095,7 @@
                 <a:solidFill>
                   <a:srgbClr val="FFFFFF"/>
                 </a:solidFill>
+                <a:latin typeface="Franklin Gothic Medium Cond"/>
               </a:rPr>
               <a:t>▸  Active — questions, pushes back</a:t>
             </a:r>
@@ -5068,6 +5111,7 @@
                 <a:solidFill>
                   <a:srgbClr val="FFFFFF"/>
                 </a:solidFill>
+                <a:latin typeface="Franklin Gothic Medium Cond"/>
               </a:rPr>
               <a:t>▸  Iterates and asks follow-ups</a:t>
             </a:r>
@@ -5083,6 +5127,7 @@
                 <a:solidFill>
                   <a:srgbClr val="FFFFFF"/>
                 </a:solidFill>
+                <a:latin typeface="Franklin Gothic Medium Cond"/>
               </a:rPr>
               <a:t>▸  Treats AI like a smart assistant</a:t>
             </a:r>
@@ -5098,6 +5143,7 @@
                 <a:solidFill>
                   <a:srgbClr val="FFFFFF"/>
                 </a:solidFill>
+                <a:latin typeface="Franklin Gothic Medium Cond"/>
               </a:rPr>
               <a:t>▸  Uses vague answers as a chance to clarify</a:t>
             </a:r>
@@ -5145,7 +5191,7 @@
             <a:avLst/>
           </a:prstGeom>
           <a:solidFill>
-            <a:srgbClr val="00BFA5"/>
+            <a:srgbClr val="0A3370"/>
           </a:solidFill>
           <a:ln>
             <a:noFill/>
@@ -5201,6 +5247,7 @@
                 <a:solidFill>
                   <a:srgbClr val="FFFFFF"/>
                 </a:solidFill>
+                <a:latin typeface="Franklin Gothic Medium Cond"/>
               </a:rPr>
               <a:t>✏️  Activity: Mindset Makeover</a:t>
             </a:r>
@@ -5235,6 +5282,7 @@
                 <a:solidFill>
                   <a:srgbClr val="FFFFFF"/>
                 </a:solidFill>
+                <a:latin typeface="Franklin Gothic Medium Cond"/>
               </a:rPr>
               <a:t>⏱  8 min</a:t>
             </a:r>
@@ -5256,7 +5304,7 @@
             <a:avLst/>
           </a:prstGeom>
           <a:solidFill>
-            <a:srgbClr val="E8ECF8"/>
+            <a:srgbClr val="F0F4FA"/>
           </a:solidFill>
           <a:ln>
             <a:noFill/>
@@ -5314,8 +5362,9 @@
             <a:r>
               <a:rPr sz="2100">
                 <a:solidFill>
-                  <a:srgbClr val="1A1A2E"/>
-                </a:solidFill>
+                  <a:srgbClr val="00244E"/>
+                </a:solidFill>
+                <a:latin typeface="Franklin Gothic Medium Cond"/>
               </a:rPr>
               <a:t>Work with a partner (2 min each direction).</a:t>
             </a:r>
@@ -5329,8 +5378,9 @@
             <a:r>
               <a:rPr sz="2100">
                 <a:solidFill>
-                  <a:srgbClr val="1A1A2E"/>
-                </a:solidFill>
+                  <a:srgbClr val="00244E"/>
+                </a:solidFill>
+                <a:latin typeface="Franklin Gothic Medium Cond"/>
               </a:rPr>
               <a:t/>
             </a:r>
@@ -5344,8 +5394,9 @@
             <a:r>
               <a:rPr sz="2100">
                 <a:solidFill>
-                  <a:srgbClr val="1A1A2E"/>
-                </a:solidFill>
+                  <a:srgbClr val="00244E"/>
+                </a:solidFill>
+                <a:latin typeface="Franklin Gothic Medium Cond"/>
               </a:rPr>
               <a:t>Step 1:  Partner A reads a 'search mindset' prompt aloud.</a:t>
             </a:r>
@@ -5359,8 +5410,9 @@
             <a:r>
               <a:rPr sz="2100">
                 <a:solidFill>
-                  <a:srgbClr val="1A1A2E"/>
-                </a:solidFill>
+                  <a:srgbClr val="00244E"/>
+                </a:solidFill>
+                <a:latin typeface="Franklin Gothic Medium Cond"/>
               </a:rPr>
               <a:t>Step 2:  Partner B rewrites it as a 'collaborator mindset' prompt.</a:t>
             </a:r>
@@ -5374,8 +5426,9 @@
             <a:r>
               <a:rPr sz="2100">
                 <a:solidFill>
-                  <a:srgbClr val="1A1A2E"/>
-                </a:solidFill>
+                  <a:srgbClr val="00244E"/>
+                </a:solidFill>
+                <a:latin typeface="Franklin Gothic Medium Cond"/>
               </a:rPr>
               <a:t>Step 3:  Switch roles.</a:t>
             </a:r>
@@ -5389,8 +5442,9 @@
             <a:r>
               <a:rPr sz="2100">
                 <a:solidFill>
-                  <a:srgbClr val="1A1A2E"/>
-                </a:solidFill>
+                  <a:srgbClr val="00244E"/>
+                </a:solidFill>
+                <a:latin typeface="Franklin Gothic Medium Cond"/>
               </a:rPr>
               <a:t/>
             </a:r>
@@ -5404,8 +5458,9 @@
             <a:r>
               <a:rPr sz="2100">
                 <a:solidFill>
-                  <a:srgbClr val="1A1A2E"/>
-                </a:solidFill>
+                  <a:srgbClr val="00244E"/>
+                </a:solidFill>
+                <a:latin typeface="Franklin Gothic Medium Cond"/>
               </a:rPr>
               <a:t>Starter prompts to transform:</a:t>
             </a:r>
@@ -5419,8 +5474,9 @@
             <a:r>
               <a:rPr sz="2100" b="1">
                 <a:solidFill>
-                  <a:srgbClr val="6C35DE"/>
-                </a:solidFill>
+                  <a:srgbClr val="00244E"/>
+                </a:solidFill>
+                <a:latin typeface="Franklin Gothic Medium Cond"/>
               </a:rPr>
               <a:t>→  'Study tips for exams'</a:t>
             </a:r>
@@ -5434,8 +5490,9 @@
             <a:r>
               <a:rPr sz="2100" b="1">
                 <a:solidFill>
-                  <a:srgbClr val="6C35DE"/>
-                </a:solidFill>
+                  <a:srgbClr val="00244E"/>
+                </a:solidFill>
+                <a:latin typeface="Franklin Gothic Medium Cond"/>
               </a:rPr>
               <a:t>→  'How to write a conclusion'</a:t>
             </a:r>
@@ -5449,8 +5506,9 @@
             <a:r>
               <a:rPr sz="2100" b="1">
                 <a:solidFill>
-                  <a:srgbClr val="6C35DE"/>
-                </a:solidFill>
+                  <a:srgbClr val="00244E"/>
+                </a:solidFill>
+                <a:latin typeface="Franklin Gothic Medium Cond"/>
               </a:rPr>
               <a:t>→  'Vocabulary for academic writing'</a:t>
             </a:r>
@@ -5464,8 +5522,9 @@
             <a:r>
               <a:rPr sz="2100" b="1">
                 <a:solidFill>
-                  <a:srgbClr val="6C35DE"/>
-                </a:solidFill>
+                  <a:srgbClr val="00244E"/>
+                </a:solidFill>
+                <a:latin typeface="Franklin Gothic Medium Cond"/>
               </a:rPr>
               <a:t>→  'What is plagiarism?'</a:t>
             </a:r>
@@ -5479,8 +5538,9 @@
             <a:r>
               <a:rPr sz="2100">
                 <a:solidFill>
-                  <a:srgbClr val="1A1A2E"/>
-                </a:solidFill>
+                  <a:srgbClr val="00244E"/>
+                </a:solidFill>
+                <a:latin typeface="Franklin Gothic Medium Cond"/>
               </a:rPr>
               <a:t/>
             </a:r>
@@ -5494,8 +5554,9 @@
             <a:r>
               <a:rPr sz="2100">
                 <a:solidFill>
-                  <a:srgbClr val="1A1A2E"/>
-                </a:solidFill>
+                  <a:srgbClr val="00244E"/>
+                </a:solidFill>
+                <a:latin typeface="Franklin Gothic Medium Cond"/>
               </a:rPr>
               <a:t>Share your best rewrite with the group!</a:t>
             </a:r>
@@ -5516,7 +5577,7 @@
     <p:bg>
       <p:bgPr>
         <a:solidFill>
-          <a:srgbClr val="6C35DE"/>
+          <a:srgbClr val="00244E"/>
         </a:solidFill>
         <a:effectLst/>
       </p:bgPr>
@@ -5556,6 +5617,7 @@
                 <a:solidFill>
                   <a:srgbClr val="FFFFFF"/>
                 </a:solidFill>
+                <a:latin typeface="Franklin Gothic Medium Cond"/>
               </a:rPr>
               <a:t>3</a:t>
             </a:r>
@@ -5577,7 +5639,7 @@
             <a:avLst/>
           </a:prstGeom>
           <a:solidFill>
-            <a:srgbClr val="FFD600"/>
+            <a:srgbClr val="FDB913"/>
           </a:solidFill>
           <a:ln>
             <a:noFill/>
@@ -5631,8 +5693,9 @@
             <a:r>
               <a:rPr sz="1800" b="1" i="1">
                 <a:solidFill>
-                  <a:srgbClr val="FFD600"/>
-                </a:solidFill>
+                  <a:srgbClr val="FDB913"/>
+                </a:solidFill>
+                <a:latin typeface="Franklin Gothic Medium Cond"/>
               </a:rPr>
               <a:t>SECTION 3</a:t>
             </a:r>
@@ -5667,6 +5730,7 @@
                 <a:solidFill>
                   <a:srgbClr val="FFFFFF"/>
                 </a:solidFill>
+                <a:latin typeface="Franklin Gothic Medium Cond"/>
               </a:rPr>
               <a:t>Prompting Lab</a:t>
             </a:r>
@@ -5699,8 +5763,9 @@
             <a:r>
               <a:rPr sz="2200" b="0" i="1">
                 <a:solidFill>
-                  <a:srgbClr val="E8ECF8"/>
-                </a:solidFill>
+                  <a:srgbClr val="F0F4FA"/>
+                </a:solidFill>
+                <a:latin typeface="Franklin Gothic Medium Cond"/>
               </a:rPr>
               <a:t>4 Strategies  ·  Examples  ·  Try-It Activities</a:t>
             </a:r>
@@ -5748,7 +5813,7 @@
             <a:avLst/>
           </a:prstGeom>
           <a:solidFill>
-            <a:srgbClr val="6C35DE"/>
+            <a:srgbClr val="00244E"/>
           </a:solidFill>
           <a:ln>
             <a:noFill/>
@@ -5804,6 +5869,7 @@
                 <a:solidFill>
                   <a:srgbClr val="FFFFFF"/>
                 </a:solidFill>
+                <a:latin typeface="Franklin Gothic Medium Cond"/>
               </a:rPr>
               <a:t>Strategy 1: Role + Task Prompting</a:t>
             </a:r>
@@ -5836,8 +5902,9 @@
             <a:r>
               <a:rPr sz="1800" b="0" i="1">
                 <a:solidFill>
-                  <a:srgbClr val="E8ECF8"/>
-                </a:solidFill>
+                  <a:srgbClr val="F0F4FA"/>
+                </a:solidFill>
+                <a:latin typeface="Franklin Gothic Medium Cond"/>
               </a:rPr>
               <a:t>Tell AI WHO it is and WHAT you need it to do</a:t>
             </a:r>
@@ -5859,7 +5926,7 @@
             <a:avLst/>
           </a:prstGeom>
           <a:solidFill>
-            <a:srgbClr val="E8ECF8"/>
+            <a:srgbClr val="F0F4FA"/>
           </a:solidFill>
           <a:ln>
             <a:noFill/>
@@ -5913,8 +5980,9 @@
             <a:r>
               <a:rPr sz="1500" b="1" i="0">
                 <a:solidFill>
-                  <a:srgbClr val="6C35DE"/>
-                </a:solidFill>
+                  <a:srgbClr val="00244E"/>
+                </a:solidFill>
+                <a:latin typeface="Franklin Gothic Medium Cond"/>
               </a:rPr>
               <a:t>TEMPLATE</a:t>
             </a:r>
@@ -5947,8 +6015,9 @@
             <a:r>
               <a:rPr sz="2200" b="1" i="1">
                 <a:solidFill>
-                  <a:srgbClr val="6C35DE"/>
-                </a:solidFill>
+                  <a:srgbClr val="00244E"/>
+                </a:solidFill>
+                <a:latin typeface="Franklin Gothic Medium Cond"/>
               </a:rPr>
               <a:t>"Act as [ROLE]. Your audience is [AUDIENCE]. [TASK]. Use [TONE/FORMAT]."</a:t>
             </a:r>
@@ -5970,7 +6039,7 @@
             <a:avLst/>
           </a:prstGeom>
           <a:solidFill>
-            <a:srgbClr val="6C35DE"/>
+            <a:srgbClr val="00244E"/>
           </a:solidFill>
           <a:ln>
             <a:noFill/>
@@ -6024,8 +6093,9 @@
             <a:r>
               <a:rPr sz="1700" b="1" i="0">
                 <a:solidFill>
-                  <a:srgbClr val="FF6D00"/>
-                </a:solidFill>
+                  <a:srgbClr val="E28E03"/>
+                </a:solidFill>
+                <a:latin typeface="Franklin Gothic Medium Cond"/>
               </a:rPr>
               <a:t>Why it works:</a:t>
             </a:r>
@@ -6058,8 +6128,9 @@
             <a:r>
               <a:rPr sz="1900" b="0" i="0">
                 <a:solidFill>
-                  <a:srgbClr val="1A1A2E"/>
-                </a:solidFill>
+                  <a:srgbClr val="00244E"/>
+                </a:solidFill>
+                <a:latin typeface="Franklin Gothic Medium Cond"/>
               </a:rPr>
               <a:t>▸  Role sets the expertise level and vocabulary AI uses</a:t>
             </a:r>
@@ -6092,8 +6163,9 @@
             <a:r>
               <a:rPr sz="1900" b="0" i="0">
                 <a:solidFill>
-                  <a:srgbClr val="1A1A2E"/>
-                </a:solidFill>
+                  <a:srgbClr val="00244E"/>
+                </a:solidFill>
+                <a:latin typeface="Franklin Gothic Medium Cond"/>
               </a:rPr>
               <a:t>▸  Task gives a clear goal — no guessing</a:t>
             </a:r>
@@ -6126,8 +6198,9 @@
             <a:r>
               <a:rPr sz="1900" b="0" i="0">
                 <a:solidFill>
-                  <a:srgbClr val="1A1A2E"/>
-                </a:solidFill>
+                  <a:srgbClr val="00244E"/>
+                </a:solidFill>
+                <a:latin typeface="Franklin Gothic Medium Cond"/>
               </a:rPr>
               <a:t>▸  Audience shapes complexity and tone</a:t>
             </a:r>
@@ -6160,8 +6233,9 @@
             <a:r>
               <a:rPr sz="1900" b="0" i="0">
                 <a:solidFill>
-                  <a:srgbClr val="1A1A2E"/>
-                </a:solidFill>
+                  <a:srgbClr val="00244E"/>
+                </a:solidFill>
+                <a:latin typeface="Franklin Gothic Medium Cond"/>
               </a:rPr>
               <a:t>▸  Format ensures output is ready to use</a:t>
             </a:r>
@@ -6209,7 +6283,7 @@
             <a:avLst/>
           </a:prstGeom>
           <a:solidFill>
-            <a:srgbClr val="6C35DE"/>
+            <a:srgbClr val="00244E"/>
           </a:solidFill>
           <a:ln>
             <a:noFill/>
@@ -6265,6 +6339,7 @@
                 <a:solidFill>
                   <a:srgbClr val="FFFFFF"/>
                 </a:solidFill>
+                <a:latin typeface="Franklin Gothic Medium Cond"/>
               </a:rPr>
               <a:t>Strategy 1 — Role + Task Example</a:t>
             </a:r>
@@ -6297,8 +6372,9 @@
             <a:r>
               <a:rPr sz="1800" b="0" i="1">
                 <a:solidFill>
-                  <a:srgbClr val="E8ECF8"/>
-                </a:solidFill>
+                  <a:srgbClr val="F0F4FA"/>
+                </a:solidFill>
+                <a:latin typeface="Franklin Gothic Medium Cond"/>
               </a:rPr>
               <a:t>Role: Tutor  |  Audience: First-year student  |  Format: 3 examples</a:t>
             </a:r>
@@ -6320,7 +6396,7 @@
             <a:avLst/>
           </a:prstGeom>
           <a:solidFill>
-            <a:srgbClr val="228BE6"/>
+            <a:srgbClr val="009DEA"/>
           </a:solidFill>
           <a:ln>
             <a:noFill/>
@@ -6376,6 +6452,7 @@
                 <a:solidFill>
                   <a:srgbClr val="FFFFFF"/>
                 </a:solidFill>
+                <a:latin typeface="Franklin Gothic Medium Cond"/>
               </a:rPr>
               <a:t>PROMPT</a:t>
             </a:r>
@@ -6397,7 +6474,7 @@
             <a:avLst/>
           </a:prstGeom>
           <a:solidFill>
-            <a:srgbClr val="E8ECF8"/>
+            <a:srgbClr val="F0F4FA"/>
           </a:solidFill>
           <a:ln>
             <a:noFill/>
@@ -6450,8 +6527,9 @@
             <a:r>
               <a:rPr sz="1900" i="1">
                 <a:solidFill>
-                  <a:srgbClr val="6C35DE"/>
-                </a:solidFill>
+                  <a:srgbClr val="00244E"/>
+                </a:solidFill>
+                <a:latin typeface="Franklin Gothic Medium Cond"/>
               </a:rPr>
               <a:t>Act as an academic English tutor. My student is a first-year international student who struggles with thesis statements. Explain what a thesis statement is and give 3 examples — one weak, one okay, one strong. Use simple language.</a:t>
             </a:r>
@@ -6473,7 +6551,7 @@
             <a:avLst/>
           </a:prstGeom>
           <a:solidFill>
-            <a:srgbClr val="00BFA5"/>
+            <a:srgbClr val="0A3370"/>
           </a:solidFill>
           <a:ln>
             <a:noFill/>
@@ -6529,6 +6607,7 @@
                 <a:solidFill>
                   <a:srgbClr val="FFFFFF"/>
                 </a:solidFill>
+                <a:latin typeface="Franklin Gothic Medium Cond"/>
               </a:rPr>
               <a:t>AI OUTPUT</a:t>
             </a:r>
@@ -6550,7 +6629,7 @@
             <a:avLst/>
           </a:prstGeom>
           <a:solidFill>
-            <a:srgbClr val="E8ECF8"/>
+            <a:srgbClr val="F0F4FA"/>
           </a:solidFill>
           <a:ln>
             <a:noFill/>
@@ -6603,7 +6682,7 @@
             <a:r>
               <a:rPr sz="1800">
                 <a:solidFill>
-                  <a:srgbClr val="444466"/>
+                  <a:srgbClr val="0A3370"/>
                 </a:solidFill>
               </a:rPr>
               <a:t>A thesis statement is the main argument of your essay — it tells your reader what you will prove.
@@ -6655,7 +6734,7 @@
             <a:avLst/>
           </a:prstGeom>
           <a:solidFill>
-            <a:srgbClr val="6C35DE"/>
+            <a:srgbClr val="00244E"/>
           </a:solidFill>
           <a:ln>
             <a:noFill/>
@@ -6711,6 +6790,7 @@
                 <a:solidFill>
                   <a:srgbClr val="FFFFFF"/>
                 </a:solidFill>
+                <a:latin typeface="Franklin Gothic Medium Cond"/>
               </a:rPr>
               <a:t>✏️  Activity: Try It: Role + Task</a:t>
             </a:r>
@@ -6745,6 +6825,7 @@
                 <a:solidFill>
                   <a:srgbClr val="FFFFFF"/>
                 </a:solidFill>
+                <a:latin typeface="Franklin Gothic Medium Cond"/>
               </a:rPr>
               <a:t>⏱  6 min</a:t>
             </a:r>
@@ -6766,7 +6847,7 @@
             <a:avLst/>
           </a:prstGeom>
           <a:solidFill>
-            <a:srgbClr val="E8ECF8"/>
+            <a:srgbClr val="F0F4FA"/>
           </a:solidFill>
           <a:ln>
             <a:noFill/>
@@ -6824,8 +6905,9 @@
             <a:r>
               <a:rPr sz="2100">
                 <a:solidFill>
-                  <a:srgbClr val="1A1A2E"/>
-                </a:solidFill>
+                  <a:srgbClr val="00244E"/>
+                </a:solidFill>
+                <a:latin typeface="Franklin Gothic Medium Cond"/>
               </a:rPr>
               <a:t>Write a Role + Task prompt for ONE of these situations:</a:t>
             </a:r>
@@ -6839,8 +6921,9 @@
             <a:r>
               <a:rPr sz="2100">
                 <a:solidFill>
-                  <a:srgbClr val="1A1A2E"/>
-                </a:solidFill>
+                  <a:srgbClr val="00244E"/>
+                </a:solidFill>
+                <a:latin typeface="Franklin Gothic Medium Cond"/>
               </a:rPr>
               <a:t/>
             </a:r>
@@ -6854,8 +6937,9 @@
             <a:r>
               <a:rPr sz="2100" b="1">
                 <a:solidFill>
-                  <a:srgbClr val="6C35DE"/>
-                </a:solidFill>
+                  <a:srgbClr val="00244E"/>
+                </a:solidFill>
+                <a:latin typeface="Franklin Gothic Medium Cond"/>
               </a:rPr>
               <a:t>→  You are preparing for a job interview at a tech company.</a:t>
             </a:r>
@@ -6869,8 +6953,9 @@
             <a:r>
               <a:rPr sz="2100" b="1">
                 <a:solidFill>
-                  <a:srgbClr val="6C35DE"/>
-                </a:solidFill>
+                  <a:srgbClr val="00244E"/>
+                </a:solidFill>
+                <a:latin typeface="Franklin Gothic Medium Cond"/>
               </a:rPr>
               <a:t>→  You need to explain your research topic to a non-expert friend.</a:t>
             </a:r>
@@ -6884,8 +6969,9 @@
             <a:r>
               <a:rPr sz="2100" b="1">
                 <a:solidFill>
-                  <a:srgbClr val="6C35DE"/>
-                </a:solidFill>
+                  <a:srgbClr val="00244E"/>
+                </a:solidFill>
+                <a:latin typeface="Franklin Gothic Medium Cond"/>
               </a:rPr>
               <a:t>→  You want feedback on an email you wrote to a professor.</a:t>
             </a:r>
@@ -6899,8 +6985,9 @@
             <a:r>
               <a:rPr sz="2100" b="1">
                 <a:solidFill>
-                  <a:srgbClr val="6C35DE"/>
-                </a:solidFill>
+                  <a:srgbClr val="00244E"/>
+                </a:solidFill>
+                <a:latin typeface="Franklin Gothic Medium Cond"/>
               </a:rPr>
               <a:t>→  You are writing a cover letter for an internship.</a:t>
             </a:r>
@@ -6914,8 +7001,9 @@
             <a:r>
               <a:rPr sz="2100">
                 <a:solidFill>
-                  <a:srgbClr val="1A1A2E"/>
-                </a:solidFill>
+                  <a:srgbClr val="00244E"/>
+                </a:solidFill>
+                <a:latin typeface="Franklin Gothic Medium Cond"/>
               </a:rPr>
               <a:t/>
             </a:r>
@@ -6929,8 +7017,9 @@
             <a:r>
               <a:rPr sz="2100">
                 <a:solidFill>
-                  <a:srgbClr val="1A1A2E"/>
-                </a:solidFill>
+                  <a:srgbClr val="00244E"/>
+                </a:solidFill>
+                <a:latin typeface="Franklin Gothic Medium Cond"/>
               </a:rPr>
               <a:t>Use the template:</a:t>
             </a:r>
@@ -6944,8 +7033,9 @@
             <a:r>
               <a:rPr sz="2100" b="1">
                 <a:solidFill>
-                  <a:srgbClr val="6C35DE"/>
-                </a:solidFill>
+                  <a:srgbClr val="00244E"/>
+                </a:solidFill>
+                <a:latin typeface="Franklin Gothic Medium Cond"/>
               </a:rPr>
               <a:t>→  'Act as [ROLE]. My audience is [AUDIENCE]. [TASK]. Use [FORMAT].'</a:t>
             </a:r>
@@ -6959,8 +7049,9 @@
             <a:r>
               <a:rPr sz="2100">
                 <a:solidFill>
-                  <a:srgbClr val="1A1A2E"/>
-                </a:solidFill>
+                  <a:srgbClr val="00244E"/>
+                </a:solidFill>
+                <a:latin typeface="Franklin Gothic Medium Cond"/>
               </a:rPr>
               <a:t/>
             </a:r>
@@ -6974,8 +7065,9 @@
             <a:r>
               <a:rPr sz="2100">
                 <a:solidFill>
-                  <a:srgbClr val="1A1A2E"/>
-                </a:solidFill>
+                  <a:srgbClr val="00244E"/>
+                </a:solidFill>
+                <a:latin typeface="Franklin Gothic Medium Cond"/>
               </a:rPr>
               <a:t>Share your prompt with a neighbour and compare results!</a:t>
             </a:r>
@@ -7036,6 +7128,7 @@
                 <a:solidFill>
                   <a:srgbClr val="FFFFFF"/>
                 </a:solidFill>
+                <a:latin typeface="Franklin Gothic Medium Cond"/>
               </a:rPr>
               <a:t>0</a:t>
             </a:r>
@@ -7057,7 +7150,7 @@
             <a:avLst/>
           </a:prstGeom>
           <a:solidFill>
-            <a:srgbClr val="FFD600"/>
+            <a:srgbClr val="FDB913"/>
           </a:solidFill>
           <a:ln>
             <a:noFill/>
@@ -7111,8 +7204,9 @@
             <a:r>
               <a:rPr sz="1800" b="1" i="1">
                 <a:solidFill>
-                  <a:srgbClr val="FFD600"/>
-                </a:solidFill>
+                  <a:srgbClr val="FDB913"/>
+                </a:solidFill>
+                <a:latin typeface="Franklin Gothic Medium Cond"/>
               </a:rPr>
               <a:t>SECTION 0</a:t>
             </a:r>
@@ -7147,6 +7241,7 @@
                 <a:solidFill>
                   <a:srgbClr val="FFFFFF"/>
                 </a:solidFill>
+                <a:latin typeface="Franklin Gothic Medium Cond"/>
               </a:rPr>
               <a:t>Opening Quiz</a:t>
             </a:r>
@@ -7179,8 +7274,9 @@
             <a:r>
               <a:rPr sz="2200" b="0" i="1">
                 <a:solidFill>
-                  <a:srgbClr val="E8ECF8"/>
-                </a:solidFill>
+                  <a:srgbClr val="F0F4FA"/>
+                </a:solidFill>
+                <a:latin typeface="Franklin Gothic Medium Cond"/>
               </a:rPr>
               <a:t>Let's see what you already know — no grades, just fun!</a:t>
             </a:r>
@@ -7228,7 +7324,7 @@
             <a:avLst/>
           </a:prstGeom>
           <a:solidFill>
-            <a:srgbClr val="228BE6"/>
+            <a:srgbClr val="009DEA"/>
           </a:solidFill>
           <a:ln>
             <a:noFill/>
@@ -7284,6 +7380,7 @@
                 <a:solidFill>
                   <a:srgbClr val="FFFFFF"/>
                 </a:solidFill>
+                <a:latin typeface="Franklin Gothic Medium Cond"/>
               </a:rPr>
               <a:t>Strategy 2: Step-by-Step / Scaffolded Prompting</a:t>
             </a:r>
@@ -7316,8 +7413,9 @@
             <a:r>
               <a:rPr sz="1800" b="0" i="1">
                 <a:solidFill>
-                  <a:srgbClr val="E8ECF8"/>
-                </a:solidFill>
+                  <a:srgbClr val="F0F4FA"/>
+                </a:solidFill>
+                <a:latin typeface="Franklin Gothic Medium Cond"/>
               </a:rPr>
               <a:t>Break complex tasks into guided stages</a:t>
             </a:r>
@@ -7339,7 +7437,7 @@
             <a:avLst/>
           </a:prstGeom>
           <a:solidFill>
-            <a:srgbClr val="E8ECF8"/>
+            <a:srgbClr val="F0F4FA"/>
           </a:solidFill>
           <a:ln>
             <a:noFill/>
@@ -7393,8 +7491,9 @@
             <a:r>
               <a:rPr sz="1600" b="1" i="0">
                 <a:solidFill>
-                  <a:srgbClr val="228BE6"/>
-                </a:solidFill>
+                  <a:srgbClr val="009DEA"/>
+                </a:solidFill>
+                <a:latin typeface="Franklin Gothic Medium Cond"/>
               </a:rPr>
               <a:t>HOW TO ASK FOR BREAKDOWNS</a:t>
             </a:r>
@@ -7416,7 +7515,7 @@
             <a:avLst/>
           </a:prstGeom>
           <a:solidFill>
-            <a:srgbClr val="228BE6"/>
+            <a:srgbClr val="009DEA"/>
           </a:solidFill>
           <a:ln>
             <a:noFill/>
@@ -7472,6 +7571,7 @@
                 <a:solidFill>
                   <a:srgbClr val="FFFFFF"/>
                 </a:solidFill>
+                <a:latin typeface="Franklin Gothic Medium Cond"/>
               </a:rPr>
               <a:t>1</a:t>
             </a:r>
@@ -7506,6 +7606,7 @@
                 <a:solidFill>
                   <a:srgbClr val="FFFFFF"/>
                 </a:solidFill>
+                <a:latin typeface="Franklin Gothic Medium Cond"/>
               </a:rPr>
               <a:t>Start Big</a:t>
             </a:r>
@@ -7539,6 +7640,7 @@
                 <a:solidFill>
                   <a:srgbClr val="FFFFFF"/>
                 </a:solidFill>
+                <a:latin typeface="Franklin Gothic Medium Cond"/>
               </a:rPr>
               <a:t>Ask for an overview or outline first.</a:t>
             </a:r>
@@ -7560,7 +7662,7 @@
             <a:avLst/>
           </a:prstGeom>
           <a:solidFill>
-            <a:srgbClr val="6C35DE"/>
+            <a:srgbClr val="00244E"/>
           </a:solidFill>
           <a:ln>
             <a:noFill/>
@@ -7616,6 +7718,7 @@
                 <a:solidFill>
                   <a:srgbClr val="FFFFFF"/>
                 </a:solidFill>
+                <a:latin typeface="Franklin Gothic Medium Cond"/>
               </a:rPr>
               <a:t>2</a:t>
             </a:r>
@@ -7650,6 +7753,7 @@
                 <a:solidFill>
                   <a:srgbClr val="FFFFFF"/>
                 </a:solidFill>
+                <a:latin typeface="Franklin Gothic Medium Cond"/>
               </a:rPr>
               <a:t>Zoom In</a:t>
             </a:r>
@@ -7683,6 +7787,7 @@
                 <a:solidFill>
                   <a:srgbClr val="FFFFFF"/>
                 </a:solidFill>
+                <a:latin typeface="Franklin Gothic Medium Cond"/>
               </a:rPr>
               <a:t>Follow up: 'Now explain step 2 in more detail.'</a:t>
             </a:r>
@@ -7704,7 +7809,7 @@
             <a:avLst/>
           </a:prstGeom>
           <a:solidFill>
-            <a:srgbClr val="00BFA5"/>
+            <a:srgbClr val="0A3370"/>
           </a:solidFill>
           <a:ln>
             <a:noFill/>
@@ -7760,6 +7865,7 @@
                 <a:solidFill>
                   <a:srgbClr val="FFFFFF"/>
                 </a:solidFill>
+                <a:latin typeface="Franklin Gothic Medium Cond"/>
               </a:rPr>
               <a:t>3</a:t>
             </a:r>
@@ -7794,6 +7900,7 @@
                 <a:solidFill>
                   <a:srgbClr val="FFFFFF"/>
                 </a:solidFill>
+                <a:latin typeface="Franklin Gothic Medium Cond"/>
               </a:rPr>
               <a:t>Check In</a:t>
             </a:r>
@@ -7827,6 +7934,7 @@
                 <a:solidFill>
                   <a:srgbClr val="FFFFFF"/>
                 </a:solidFill>
+                <a:latin typeface="Franklin Gothic Medium Cond"/>
               </a:rPr>
               <a:t>Ask: 'What have I missed? What should I consider next?'</a:t>
             </a:r>
@@ -7848,7 +7956,7 @@
             <a:avLst/>
           </a:prstGeom>
           <a:solidFill>
-            <a:srgbClr val="FF6D00"/>
+            <a:srgbClr val="E28E03"/>
           </a:solidFill>
           <a:ln>
             <a:noFill/>
@@ -7904,6 +8012,7 @@
                 <a:solidFill>
                   <a:srgbClr val="FFFFFF"/>
                 </a:solidFill>
+                <a:latin typeface="Franklin Gothic Medium Cond"/>
               </a:rPr>
               <a:t>4</a:t>
             </a:r>
@@ -7938,6 +8047,7 @@
                 <a:solidFill>
                   <a:srgbClr val="FFFFFF"/>
                 </a:solidFill>
+                <a:latin typeface="Franklin Gothic Medium Cond"/>
               </a:rPr>
               <a:t>Iterate</a:t>
             </a:r>
@@ -7971,6 +8081,7 @@
                 <a:solidFill>
                   <a:srgbClr val="FFFFFF"/>
                 </a:solidFill>
+                <a:latin typeface="Franklin Gothic Medium Cond"/>
               </a:rPr>
               <a:t>Refine: 'Simplify this section. Add an example.'</a:t>
             </a:r>
@@ -8018,7 +8129,7 @@
             <a:avLst/>
           </a:prstGeom>
           <a:solidFill>
-            <a:srgbClr val="228BE6"/>
+            <a:srgbClr val="009DEA"/>
           </a:solidFill>
           <a:ln>
             <a:noFill/>
@@ -8074,6 +8185,7 @@
                 <a:solidFill>
                   <a:srgbClr val="FFFFFF"/>
                 </a:solidFill>
+                <a:latin typeface="Franklin Gothic Medium Cond"/>
               </a:rPr>
               <a:t>Strategy 2 — Scaffolded Prompting Example</a:t>
             </a:r>
@@ -8106,8 +8218,9 @@
             <a:r>
               <a:rPr sz="1800" b="0" i="1">
                 <a:solidFill>
-                  <a:srgbClr val="E8ECF8"/>
-                </a:solidFill>
+                  <a:srgbClr val="F0F4FA"/>
+                </a:solidFill>
+                <a:latin typeface="Franklin Gothic Medium Cond"/>
               </a:rPr>
               <a:t>Notice: you control the pace, AI builds step by step</a:t>
             </a:r>
@@ -8129,7 +8242,7 @@
             <a:avLst/>
           </a:prstGeom>
           <a:solidFill>
-            <a:srgbClr val="228BE6"/>
+            <a:srgbClr val="009DEA"/>
           </a:solidFill>
           <a:ln>
             <a:noFill/>
@@ -8185,6 +8298,7 @@
                 <a:solidFill>
                   <a:srgbClr val="FFFFFF"/>
                 </a:solidFill>
+                <a:latin typeface="Franklin Gothic Medium Cond"/>
               </a:rPr>
               <a:t>PROMPT</a:t>
             </a:r>
@@ -8206,7 +8320,7 @@
             <a:avLst/>
           </a:prstGeom>
           <a:solidFill>
-            <a:srgbClr val="E8ECF8"/>
+            <a:srgbClr val="F0F4FA"/>
           </a:solidFill>
           <a:ln>
             <a:noFill/>
@@ -8259,8 +8373,9 @@
             <a:r>
               <a:rPr sz="1900" i="1">
                 <a:solidFill>
-                  <a:srgbClr val="6C35DE"/>
-                </a:solidFill>
+                  <a:srgbClr val="00244E"/>
+                </a:solidFill>
+                <a:latin typeface="Franklin Gothic Medium Cond"/>
               </a:rPr>
               <a:t>I need to write a 1,500-word essay on globalisation and education. Start by giving me an outline with 5 sections and 2–3 bullet points per section. Do not write the essay yet — just the structure.</a:t>
             </a:r>
@@ -8282,7 +8397,7 @@
             <a:avLst/>
           </a:prstGeom>
           <a:solidFill>
-            <a:srgbClr val="00BFA5"/>
+            <a:srgbClr val="0A3370"/>
           </a:solidFill>
           <a:ln>
             <a:noFill/>
@@ -8338,6 +8453,7 @@
                 <a:solidFill>
                   <a:srgbClr val="FFFFFF"/>
                 </a:solidFill>
+                <a:latin typeface="Franklin Gothic Medium Cond"/>
               </a:rPr>
               <a:t>AI OUTPUT</a:t>
             </a:r>
@@ -8359,7 +8475,7 @@
             <a:avLst/>
           </a:prstGeom>
           <a:solidFill>
-            <a:srgbClr val="E8ECF8"/>
+            <a:srgbClr val="F0F4FA"/>
           </a:solidFill>
           <a:ln>
             <a:noFill/>
@@ -8412,7 +8528,7 @@
             <a:r>
               <a:rPr sz="1800">
                 <a:solidFill>
-                  <a:srgbClr val="444466"/>
+                  <a:srgbClr val="0A3370"/>
                 </a:solidFill>
               </a:rPr>
               <a:t>Outline: Globalisation &amp; Education
@@ -8466,7 +8582,7 @@
             <a:avLst/>
           </a:prstGeom>
           <a:solidFill>
-            <a:srgbClr val="228BE6"/>
+            <a:srgbClr val="009DEA"/>
           </a:solidFill>
           <a:ln>
             <a:noFill/>
@@ -8522,6 +8638,7 @@
                 <a:solidFill>
                   <a:srgbClr val="FFFFFF"/>
                 </a:solidFill>
+                <a:latin typeface="Franklin Gothic Medium Cond"/>
               </a:rPr>
               <a:t>✏️  Activity: Try It: Scaffolded Prompting</a:t>
             </a:r>
@@ -8556,6 +8673,7 @@
                 <a:solidFill>
                   <a:srgbClr val="FFFFFF"/>
                 </a:solidFill>
+                <a:latin typeface="Franklin Gothic Medium Cond"/>
               </a:rPr>
               <a:t>⏱  7 min</a:t>
             </a:r>
@@ -8577,7 +8695,7 @@
             <a:avLst/>
           </a:prstGeom>
           <a:solidFill>
-            <a:srgbClr val="E8ECF8"/>
+            <a:srgbClr val="F0F4FA"/>
           </a:solidFill>
           <a:ln>
             <a:noFill/>
@@ -8635,8 +8753,9 @@
             <a:r>
               <a:rPr sz="2100">
                 <a:solidFill>
-                  <a:srgbClr val="1A1A2E"/>
-                </a:solidFill>
+                  <a:srgbClr val="00244E"/>
+                </a:solidFill>
+                <a:latin typeface="Franklin Gothic Medium Cond"/>
               </a:rPr>
               <a:t>Pick a task you are currently working on (or use the prompt below):</a:t>
             </a:r>
@@ -8650,8 +8769,9 @@
             <a:r>
               <a:rPr sz="2100">
                 <a:solidFill>
-                  <a:srgbClr val="1A1A2E"/>
-                </a:solidFill>
+                  <a:srgbClr val="00244E"/>
+                </a:solidFill>
+                <a:latin typeface="Franklin Gothic Medium Cond"/>
               </a:rPr>
               <a:t/>
             </a:r>
@@ -8665,8 +8785,9 @@
             <a:r>
               <a:rPr sz="2100" b="1">
                 <a:solidFill>
-                  <a:srgbClr val="6C35DE"/>
-                </a:solidFill>
+                  <a:srgbClr val="00244E"/>
+                </a:solidFill>
+                <a:latin typeface="Franklin Gothic Medium Cond"/>
               </a:rPr>
               <a:t>→  'I need to study for my midterm exam on [your subject].'</a:t>
             </a:r>
@@ -8680,8 +8801,9 @@
             <a:r>
               <a:rPr sz="2100">
                 <a:solidFill>
-                  <a:srgbClr val="1A1A2E"/>
-                </a:solidFill>
+                  <a:srgbClr val="00244E"/>
+                </a:solidFill>
+                <a:latin typeface="Franklin Gothic Medium Cond"/>
               </a:rPr>
               <a:t/>
             </a:r>
@@ -8695,8 +8817,9 @@
             <a:r>
               <a:rPr sz="2100">
                 <a:solidFill>
-                  <a:srgbClr val="1A1A2E"/>
-                </a:solidFill>
+                  <a:srgbClr val="00244E"/>
+                </a:solidFill>
+                <a:latin typeface="Franklin Gothic Medium Cond"/>
               </a:rPr>
               <a:t>Write a scaffolded prompt sequence (3 prompts in a chain):</a:t>
             </a:r>
@@ -8710,8 +8833,9 @@
             <a:r>
               <a:rPr sz="2100" b="1">
                 <a:solidFill>
-                  <a:srgbClr val="6C35DE"/>
-                </a:solidFill>
+                  <a:srgbClr val="00244E"/>
+                </a:solidFill>
+                <a:latin typeface="Franklin Gothic Medium Cond"/>
               </a:rPr>
               <a:t>→  Prompt 1: Ask for an overview / outline</a:t>
             </a:r>
@@ -8725,8 +8849,9 @@
             <a:r>
               <a:rPr sz="2100" b="1">
                 <a:solidFill>
-                  <a:srgbClr val="6C35DE"/>
-                </a:solidFill>
+                  <a:srgbClr val="00244E"/>
+                </a:solidFill>
+                <a:latin typeface="Franklin Gothic Medium Cond"/>
               </a:rPr>
               <a:t>→  Prompt 2: Ask to expand on one section</a:t>
             </a:r>
@@ -8740,8 +8865,9 @@
             <a:r>
               <a:rPr sz="2100" b="1">
                 <a:solidFill>
-                  <a:srgbClr val="6C35DE"/>
-                </a:solidFill>
+                  <a:srgbClr val="00244E"/>
+                </a:solidFill>
+                <a:latin typeface="Franklin Gothic Medium Cond"/>
               </a:rPr>
               <a:t>→  Prompt 3: Ask for a practice question or summary</a:t>
             </a:r>
@@ -8755,8 +8881,9 @@
             <a:r>
               <a:rPr sz="2100">
                 <a:solidFill>
-                  <a:srgbClr val="1A1A2E"/>
-                </a:solidFill>
+                  <a:srgbClr val="00244E"/>
+                </a:solidFill>
+                <a:latin typeface="Franklin Gothic Medium Cond"/>
               </a:rPr>
               <a:t/>
             </a:r>
@@ -8770,8 +8897,9 @@
             <a:r>
               <a:rPr sz="2100">
                 <a:solidFill>
-                  <a:srgbClr val="1A1A2E"/>
-                </a:solidFill>
+                  <a:srgbClr val="00244E"/>
+                </a:solidFill>
+                <a:latin typeface="Franklin Gothic Medium Cond"/>
               </a:rPr>
               <a:t>Optional: Try it live on your device and share the output!</a:t>
             </a:r>
@@ -8819,7 +8947,7 @@
             <a:avLst/>
           </a:prstGeom>
           <a:solidFill>
-            <a:srgbClr val="00BFA5"/>
+            <a:srgbClr val="0A3370"/>
           </a:solidFill>
           <a:ln>
             <a:noFill/>
@@ -8875,6 +9003,7 @@
                 <a:solidFill>
                   <a:srgbClr val="FFFFFF"/>
                 </a:solidFill>
+                <a:latin typeface="Franklin Gothic Medium Cond"/>
               </a:rPr>
               <a:t>Strategy 3: Format-Based Output</a:t>
             </a:r>
@@ -8907,8 +9036,9 @@
             <a:r>
               <a:rPr sz="1800" b="0" i="1">
                 <a:solidFill>
-                  <a:srgbClr val="E8ECF8"/>
-                </a:solidFill>
+                  <a:srgbClr val="F0F4FA"/>
+                </a:solidFill>
+                <a:latin typeface="Franklin Gothic Medium Cond"/>
               </a:rPr>
               <a:t>Tell AI exactly how you want the answer structured</a:t>
             </a:r>
@@ -8930,7 +9060,7 @@
             <a:avLst/>
           </a:prstGeom>
           <a:solidFill>
-            <a:srgbClr val="00BFA5"/>
+            <a:srgbClr val="0A3370"/>
           </a:solidFill>
           <a:ln>
             <a:noFill/>
@@ -8986,6 +9116,7 @@
                 <a:solidFill>
                   <a:srgbClr val="FFFFFF"/>
                 </a:solidFill>
+                <a:latin typeface="Franklin Gothic Medium Cond"/>
               </a:rPr>
               <a:t>📊 Tables</a:t>
             </a:r>
@@ -9019,6 +9150,7 @@
                 <a:solidFill>
                   <a:srgbClr val="FFFFFF"/>
                 </a:solidFill>
+                <a:latin typeface="Franklin Gothic Medium Cond"/>
               </a:rPr>
               <a:t>Compare options side by side.
 'Give me a table comparing X, Y, Z by cost, features, and ease of use.'</a:t>
@@ -9041,7 +9173,7 @@
             <a:avLst/>
           </a:prstGeom>
           <a:solidFill>
-            <a:srgbClr val="228BE6"/>
+            <a:srgbClr val="009DEA"/>
           </a:solidFill>
           <a:ln>
             <a:noFill/>
@@ -9097,6 +9229,7 @@
                 <a:solidFill>
                   <a:srgbClr val="FFFFFF"/>
                 </a:solidFill>
+                <a:latin typeface="Franklin Gothic Medium Cond"/>
               </a:rPr>
               <a:t>☑️ Checklists</a:t>
             </a:r>
@@ -9130,6 +9263,7 @@
                 <a:solidFill>
                   <a:srgbClr val="FFFFFF"/>
                 </a:solidFill>
+                <a:latin typeface="Franklin Gothic Medium Cond"/>
               </a:rPr>
               <a:t>Get actionable to-do lists.
 'Give me a checklist of things to do before submitting my assignment.'</a:t>
@@ -9152,7 +9286,7 @@
             <a:avLst/>
           </a:prstGeom>
           <a:solidFill>
-            <a:srgbClr val="6C35DE"/>
+            <a:srgbClr val="00244E"/>
           </a:solidFill>
           <a:ln>
             <a:noFill/>
@@ -9208,6 +9342,7 @@
                 <a:solidFill>
                   <a:srgbClr val="FFFFFF"/>
                 </a:solidFill>
+                <a:latin typeface="Franklin Gothic Medium Cond"/>
               </a:rPr>
               <a:t>📄 Templates</a:t>
             </a:r>
@@ -9241,6 +9376,7 @@
                 <a:solidFill>
                   <a:srgbClr val="FFFFFF"/>
                 </a:solidFill>
+                <a:latin typeface="Franklin Gothic Medium Cond"/>
               </a:rPr>
               <a:t>Generate reusable structures.
 'Create an email template I can use to ask professors for extensions.'</a:t>
@@ -9263,7 +9399,7 @@
             <a:avLst/>
           </a:prstGeom>
           <a:solidFill>
-            <a:srgbClr val="FF6D00"/>
+            <a:srgbClr val="E28E03"/>
           </a:solidFill>
           <a:ln>
             <a:noFill/>
@@ -9319,6 +9455,7 @@
                 <a:solidFill>
                   <a:srgbClr val="FFFFFF"/>
                 </a:solidFill>
+                <a:latin typeface="Franklin Gothic Medium Cond"/>
               </a:rPr>
               <a:t>• Bullet Points</a:t>
             </a:r>
@@ -9352,6 +9489,7 @@
                 <a:solidFill>
                   <a:srgbClr val="FFFFFF"/>
                 </a:solidFill>
+                <a:latin typeface="Franklin Gothic Medium Cond"/>
               </a:rPr>
               <a:t>Scannable summaries.
 'Summarise this article in 5 bullet points, each under 15 words.'</a:t>
@@ -9374,7 +9512,7 @@
             <a:avLst/>
           </a:prstGeom>
           <a:solidFill>
-            <a:srgbClr val="00BFA5"/>
+            <a:srgbClr val="0A3370"/>
           </a:solidFill>
           <a:ln>
             <a:noFill/>
@@ -9430,6 +9568,7 @@
                 <a:solidFill>
                   <a:srgbClr val="FFFFFF"/>
                 </a:solidFill>
+                <a:latin typeface="Franklin Gothic Medium Cond"/>
               </a:rPr>
               <a:t>1. Numbered</a:t>
             </a:r>
@@ -9463,6 +9602,7 @@
                 <a:solidFill>
                   <a:srgbClr val="FFFFFF"/>
                 </a:solidFill>
+                <a:latin typeface="Franklin Gothic Medium Cond"/>
               </a:rPr>
               <a:t>Step-by-step instructions.
 'Give me numbered steps to set up a Python environment.'</a:t>
@@ -9485,7 +9625,7 @@
             <a:avLst/>
           </a:prstGeom>
           <a:solidFill>
-            <a:srgbClr val="228BE6"/>
+            <a:srgbClr val="009DEA"/>
           </a:solidFill>
           <a:ln>
             <a:noFill/>
@@ -9541,6 +9681,7 @@
                 <a:solidFill>
                   <a:srgbClr val="FFFFFF"/>
                 </a:solidFill>
+                <a:latin typeface="Franklin Gothic Medium Cond"/>
               </a:rPr>
               <a:t>¶ Paragraphs</a:t>
             </a:r>
@@ -9574,6 +9715,7 @@
                 <a:solidFill>
                   <a:srgbClr val="FFFFFF"/>
                 </a:solidFill>
+                <a:latin typeface="Franklin Gothic Medium Cond"/>
               </a:rPr>
               <a:t>Flowing prose for essays.
 'Write this as 2 short paragraphs suitable for an academic essay.'</a:t>
@@ -9622,7 +9764,7 @@
             <a:avLst/>
           </a:prstGeom>
           <a:solidFill>
-            <a:srgbClr val="00BFA5"/>
+            <a:srgbClr val="0A3370"/>
           </a:solidFill>
           <a:ln>
             <a:noFill/>
@@ -9678,6 +9820,7 @@
                 <a:solidFill>
                   <a:srgbClr val="FFFFFF"/>
                 </a:solidFill>
+                <a:latin typeface="Franklin Gothic Medium Cond"/>
               </a:rPr>
               <a:t>Strategy 3 — Format-Based Output Example</a:t>
             </a:r>
@@ -9710,8 +9853,9 @@
             <a:r>
               <a:rPr sz="1800" b="0" i="1">
                 <a:solidFill>
-                  <a:srgbClr val="E8ECF8"/>
-                </a:solidFill>
+                  <a:srgbClr val="F0F4FA"/>
+                </a:solidFill>
+                <a:latin typeface="Franklin Gothic Medium Cond"/>
               </a:rPr>
               <a:t>Formatted output is immediately usable — no reformatting required</a:t>
             </a:r>
@@ -9733,7 +9877,7 @@
             <a:avLst/>
           </a:prstGeom>
           <a:solidFill>
-            <a:srgbClr val="228BE6"/>
+            <a:srgbClr val="009DEA"/>
           </a:solidFill>
           <a:ln>
             <a:noFill/>
@@ -9789,6 +9933,7 @@
                 <a:solidFill>
                   <a:srgbClr val="FFFFFF"/>
                 </a:solidFill>
+                <a:latin typeface="Franklin Gothic Medium Cond"/>
               </a:rPr>
               <a:t>PROMPT</a:t>
             </a:r>
@@ -9810,7 +9955,7 @@
             <a:avLst/>
           </a:prstGeom>
           <a:solidFill>
-            <a:srgbClr val="E8ECF8"/>
+            <a:srgbClr val="F0F4FA"/>
           </a:solidFill>
           <a:ln>
             <a:noFill/>
@@ -9863,8 +10008,9 @@
             <a:r>
               <a:rPr sz="1900" i="1">
                 <a:solidFill>
-                  <a:srgbClr val="6C35DE"/>
-                </a:solidFill>
+                  <a:srgbClr val="00244E"/>
+                </a:solidFill>
+                <a:latin typeface="Franklin Gothic Medium Cond"/>
               </a:rPr>
               <a:t>Compare three productivity apps (Notion, Todoist, Trello) using a table. Columns: App Name, Best For, Cost, Ease of Use (1–5 stars), Mobile App. Add a recommendation row at the bottom.</a:t>
             </a:r>
@@ -9886,7 +10032,7 @@
             <a:avLst/>
           </a:prstGeom>
           <a:solidFill>
-            <a:srgbClr val="00BFA5"/>
+            <a:srgbClr val="0A3370"/>
           </a:solidFill>
           <a:ln>
             <a:noFill/>
@@ -9942,6 +10088,7 @@
                 <a:solidFill>
                   <a:srgbClr val="FFFFFF"/>
                 </a:solidFill>
+                <a:latin typeface="Franklin Gothic Medium Cond"/>
               </a:rPr>
               <a:t>AI OUTPUT</a:t>
             </a:r>
@@ -9963,7 +10110,7 @@
             <a:avLst/>
           </a:prstGeom>
           <a:solidFill>
-            <a:srgbClr val="E8ECF8"/>
+            <a:srgbClr val="F0F4FA"/>
           </a:solidFill>
           <a:ln>
             <a:noFill/>
@@ -10016,7 +10163,7 @@
             <a:r>
               <a:rPr sz="1800">
                 <a:solidFill>
-                  <a:srgbClr val="444466"/>
+                  <a:srgbClr val="0A3370"/>
                 </a:solidFill>
               </a:rPr>
               <a:t>| App      | Best For         | Cost        | Ease ⭐ | Mobile |
@@ -10070,7 +10217,7 @@
             <a:avLst/>
           </a:prstGeom>
           <a:solidFill>
-            <a:srgbClr val="FF6D00"/>
+            <a:srgbClr val="E28E03"/>
           </a:solidFill>
           <a:ln>
             <a:noFill/>
@@ -10126,6 +10273,7 @@
                 <a:solidFill>
                   <a:srgbClr val="FFFFFF"/>
                 </a:solidFill>
+                <a:latin typeface="Franklin Gothic Medium Cond"/>
               </a:rPr>
               <a:t>✏️  Activity: Try It: Format-Based Output</a:t>
             </a:r>
@@ -10160,6 +10308,7 @@
                 <a:solidFill>
                   <a:srgbClr val="FFFFFF"/>
                 </a:solidFill>
+                <a:latin typeface="Franklin Gothic Medium Cond"/>
               </a:rPr>
               <a:t>⏱  6 min</a:t>
             </a:r>
@@ -10181,7 +10330,7 @@
             <a:avLst/>
           </a:prstGeom>
           <a:solidFill>
-            <a:srgbClr val="E8ECF8"/>
+            <a:srgbClr val="F0F4FA"/>
           </a:solidFill>
           <a:ln>
             <a:noFill/>
@@ -10239,8 +10388,9 @@
             <a:r>
               <a:rPr sz="2100">
                 <a:solidFill>
-                  <a:srgbClr val="1A1A2E"/>
-                </a:solidFill>
+                  <a:srgbClr val="00244E"/>
+                </a:solidFill>
+                <a:latin typeface="Franklin Gothic Medium Cond"/>
               </a:rPr>
               <a:t>Rewrite one of these generic prompts to include a format instruction:</a:t>
             </a:r>
@@ -10254,8 +10404,9 @@
             <a:r>
               <a:rPr sz="2100">
                 <a:solidFill>
-                  <a:srgbClr val="1A1A2E"/>
-                </a:solidFill>
+                  <a:srgbClr val="00244E"/>
+                </a:solidFill>
+                <a:latin typeface="Franklin Gothic Medium Cond"/>
               </a:rPr>
               <a:t/>
             </a:r>
@@ -10269,8 +10420,9 @@
             <a:r>
               <a:rPr sz="2100" b="1">
                 <a:solidFill>
-                  <a:srgbClr val="6C35DE"/>
-                </a:solidFill>
+                  <a:srgbClr val="00244E"/>
+                </a:solidFill>
+                <a:latin typeface="Franklin Gothic Medium Cond"/>
               </a:rPr>
               <a:t>→  'Tips for managing stress during exams'</a:t>
             </a:r>
@@ -10284,8 +10436,9 @@
             <a:r>
               <a:rPr sz="2100" b="1">
                 <a:solidFill>
-                  <a:srgbClr val="6C35DE"/>
-                </a:solidFill>
+                  <a:srgbClr val="00244E"/>
+                </a:solidFill>
+                <a:latin typeface="Franklin Gothic Medium Cond"/>
               </a:rPr>
               <a:t>→  'Differences between British and American English'</a:t>
             </a:r>
@@ -10299,8 +10452,9 @@
             <a:r>
               <a:rPr sz="2100" b="1">
                 <a:solidFill>
-                  <a:srgbClr val="6C35DE"/>
-                </a:solidFill>
+                  <a:srgbClr val="00244E"/>
+                </a:solidFill>
+                <a:latin typeface="Franklin Gothic Medium Cond"/>
               </a:rPr>
               <a:t>→  'How to write a research paper'</a:t>
             </a:r>
@@ -10314,8 +10468,9 @@
             <a:r>
               <a:rPr sz="2100">
                 <a:solidFill>
-                  <a:srgbClr val="1A1A2E"/>
-                </a:solidFill>
+                  <a:srgbClr val="00244E"/>
+                </a:solidFill>
+                <a:latin typeface="Franklin Gothic Medium Cond"/>
               </a:rPr>
               <a:t/>
             </a:r>
@@ -10329,8 +10484,9 @@
             <a:r>
               <a:rPr sz="2100">
                 <a:solidFill>
-                  <a:srgbClr val="1A1A2E"/>
-                </a:solidFill>
+                  <a:srgbClr val="00244E"/>
+                </a:solidFill>
+                <a:latin typeface="Franklin Gothic Medium Cond"/>
               </a:rPr>
               <a:t>Choose a format:  Table  |  Checklist  |  Template  |  Numbered Steps</a:t>
             </a:r>
@@ -10344,8 +10500,9 @@
             <a:r>
               <a:rPr sz="2100">
                 <a:solidFill>
-                  <a:srgbClr val="1A1A2E"/>
-                </a:solidFill>
+                  <a:srgbClr val="00244E"/>
+                </a:solidFill>
+                <a:latin typeface="Franklin Gothic Medium Cond"/>
               </a:rPr>
               <a:t/>
             </a:r>
@@ -10359,8 +10516,9 @@
             <a:r>
               <a:rPr sz="2100">
                 <a:solidFill>
-                  <a:srgbClr val="1A1A2E"/>
-                </a:solidFill>
+                  <a:srgbClr val="00244E"/>
+                </a:solidFill>
+                <a:latin typeface="Franklin Gothic Medium Cond"/>
               </a:rPr>
               <a:t>Example rewrite:</a:t>
             </a:r>
@@ -10374,8 +10532,9 @@
             <a:r>
               <a:rPr sz="2100" b="1">
                 <a:solidFill>
-                  <a:srgbClr val="6C35DE"/>
-                </a:solidFill>
+                  <a:srgbClr val="00244E"/>
+                </a:solidFill>
+                <a:latin typeface="Franklin Gothic Medium Cond"/>
               </a:rPr>
               <a:t>→  'Give me a checklist of 8 steps for managing exam stress, with a ☐ checkbox before each item.'</a:t>
             </a:r>
@@ -10389,8 +10548,9 @@
             <a:r>
               <a:rPr sz="2100">
                 <a:solidFill>
-                  <a:srgbClr val="1A1A2E"/>
-                </a:solidFill>
+                  <a:srgbClr val="00244E"/>
+                </a:solidFill>
+                <a:latin typeface="Franklin Gothic Medium Cond"/>
               </a:rPr>
               <a:t/>
             </a:r>
@@ -10404,8 +10564,9 @@
             <a:r>
               <a:rPr sz="2100">
                 <a:solidFill>
-                  <a:srgbClr val="1A1A2E"/>
-                </a:solidFill>
+                  <a:srgbClr val="00244E"/>
+                </a:solidFill>
+                <a:latin typeface="Franklin Gothic Medium Cond"/>
               </a:rPr>
               <a:t>Compare outputs with a partner who chose the same topic but a different format!</a:t>
             </a:r>
@@ -10453,7 +10614,7 @@
             <a:avLst/>
           </a:prstGeom>
           <a:solidFill>
-            <a:srgbClr val="FF6D00"/>
+            <a:srgbClr val="E28E03"/>
           </a:solidFill>
           <a:ln>
             <a:noFill/>
@@ -10509,6 +10670,7 @@
                 <a:solidFill>
                   <a:srgbClr val="FFFFFF"/>
                 </a:solidFill>
+                <a:latin typeface="Franklin Gothic Medium Cond"/>
               </a:rPr>
               <a:t>Strategy 4: Revision &amp; Reflection Prompting</a:t>
             </a:r>
@@ -10541,8 +10703,9 @@
             <a:r>
               <a:rPr sz="1800" b="0" i="1">
                 <a:solidFill>
-                  <a:srgbClr val="E8ECF8"/>
-                </a:solidFill>
+                  <a:srgbClr val="F0F4FA"/>
+                </a:solidFill>
+                <a:latin typeface="Franklin Gothic Medium Cond"/>
               </a:rPr>
               <a:t>Use AI as an editor, critic, and thinking partner</a:t>
             </a:r>
@@ -10564,7 +10727,7 @@
             <a:avLst/>
           </a:prstGeom>
           <a:solidFill>
-            <a:srgbClr val="FF6D00"/>
+            <a:srgbClr val="E28E03"/>
           </a:solidFill>
           <a:ln>
             <a:noFill/>
@@ -10620,6 +10783,7 @@
                 <a:solidFill>
                   <a:srgbClr val="FFFFFF"/>
                 </a:solidFill>
+                <a:latin typeface="Franklin Gothic Medium Cond"/>
               </a:rPr>
               <a:t>✍️ Ask for Improvement</a:t>
             </a:r>
@@ -10653,6 +10817,7 @@
                 <a:solidFill>
                   <a:srgbClr val="FFFFFF"/>
                 </a:solidFill>
+                <a:latin typeface="Franklin Gothic Medium Cond"/>
               </a:rPr>
               <a:t>Paste your draft and say:
 'Improve the clarity and flow of this paragraph. Keep my original voice.'</a:t>
@@ -10675,7 +10840,7 @@
             <a:avLst/>
           </a:prstGeom>
           <a:solidFill>
-            <a:srgbClr val="6C35DE"/>
+            <a:srgbClr val="00244E"/>
           </a:solidFill>
           <a:ln>
             <a:noFill/>
@@ -10731,6 +10896,7 @@
                 <a:solidFill>
                   <a:srgbClr val="FFFFFF"/>
                 </a:solidFill>
+                <a:latin typeface="Franklin Gothic Medium Cond"/>
               </a:rPr>
               <a:t>❓ Ask for Questions First</a:t>
             </a:r>
@@ -10764,6 +10930,7 @@
                 <a:solidFill>
                   <a:srgbClr val="FFFFFF"/>
                 </a:solidFill>
+                <a:latin typeface="Franklin Gothic Medium Cond"/>
               </a:rPr>
               <a:t>Before a big task say:
 'Before you help me, ask me 5 questions to better understand my needs and context.'</a:t>
@@ -10786,7 +10953,7 @@
             <a:avLst/>
           </a:prstGeom>
           <a:solidFill>
-            <a:srgbClr val="E91E8C"/>
+            <a:srgbClr val="E28E03"/>
           </a:solidFill>
           <a:ln>
             <a:noFill/>
@@ -10842,6 +11009,7 @@
                 <a:solidFill>
                   <a:srgbClr val="FFFFFF"/>
                 </a:solidFill>
+                <a:latin typeface="Franklin Gothic Medium Cond"/>
               </a:rPr>
               <a:t>🔍 Ask for Critique</a:t>
             </a:r>
@@ -10875,6 +11043,7 @@
                 <a:solidFill>
                   <a:srgbClr val="FFFFFF"/>
                 </a:solidFill>
+                <a:latin typeface="Franklin Gothic Medium Cond"/>
               </a:rPr>
               <a:t>After a draft say:
 'What are the three weakest parts of this argument? How would you strengthen each one?'</a:t>
@@ -10897,7 +11066,7 @@
             <a:avLst/>
           </a:prstGeom>
           <a:solidFill>
-            <a:srgbClr val="228BE6"/>
+            <a:srgbClr val="009DEA"/>
           </a:solidFill>
           <a:ln>
             <a:noFill/>
@@ -10953,6 +11122,7 @@
                 <a:solidFill>
                   <a:srgbClr val="FFFFFF"/>
                 </a:solidFill>
+                <a:latin typeface="Franklin Gothic Medium Cond"/>
               </a:rPr>
               <a:t>🔀 Ask for Alternatives</a:t>
             </a:r>
@@ -10986,6 +11156,7 @@
                 <a:solidFill>
                   <a:srgbClr val="FFFFFF"/>
                 </a:solidFill>
+                <a:latin typeface="Franklin Gothic Medium Cond"/>
               </a:rPr>
               <a:t>After an output say:
 'Give me 3 alternative ways to phrase this conclusion. Rate each one and explain why.'</a:t>
@@ -11034,7 +11205,7 @@
             <a:avLst/>
           </a:prstGeom>
           <a:solidFill>
-            <a:srgbClr val="FF6D00"/>
+            <a:srgbClr val="E28E03"/>
           </a:solidFill>
           <a:ln>
             <a:noFill/>
@@ -11090,6 +11261,7 @@
                 <a:solidFill>
                   <a:srgbClr val="FFFFFF"/>
                 </a:solidFill>
+                <a:latin typeface="Franklin Gothic Medium Cond"/>
               </a:rPr>
               <a:t>Strategy 4 — Revision Example</a:t>
             </a:r>
@@ -11122,8 +11294,9 @@
             <a:r>
               <a:rPr sz="1800" b="0" i="1">
                 <a:solidFill>
-                  <a:srgbClr val="E8ECF8"/>
-                </a:solidFill>
+                  <a:srgbClr val="F0F4FA"/>
+                </a:solidFill>
+                <a:latin typeface="Franklin Gothic Medium Cond"/>
               </a:rPr>
               <a:t>AI as editor — keeps your voice, strengthens your argument</a:t>
             </a:r>
@@ -11145,7 +11318,7 @@
             <a:avLst/>
           </a:prstGeom>
           <a:solidFill>
-            <a:srgbClr val="228BE6"/>
+            <a:srgbClr val="009DEA"/>
           </a:solidFill>
           <a:ln>
             <a:noFill/>
@@ -11201,6 +11374,7 @@
                 <a:solidFill>
                   <a:srgbClr val="FFFFFF"/>
                 </a:solidFill>
+                <a:latin typeface="Franklin Gothic Medium Cond"/>
               </a:rPr>
               <a:t>PROMPT</a:t>
             </a:r>
@@ -11222,7 +11396,7 @@
             <a:avLst/>
           </a:prstGeom>
           <a:solidFill>
-            <a:srgbClr val="E8ECF8"/>
+            <a:srgbClr val="F0F4FA"/>
           </a:solidFill>
           <a:ln>
             <a:noFill/>
@@ -11275,8 +11449,9 @@
             <a:r>
               <a:rPr sz="1900" i="1">
                 <a:solidFill>
-                  <a:srgbClr val="6C35DE"/>
-                </a:solidFill>
+                  <a:srgbClr val="00244E"/>
+                </a:solidFill>
+                <a:latin typeface="Franklin Gothic Medium Cond"/>
               </a:rPr>
               <a:t>Here is my conclusion paragraph: [paste paragraph]. Identify 2 weaknesses and suggest specific improvements. Then give me a revised version that is more academic in tone.</a:t>
             </a:r>
@@ -11298,7 +11473,7 @@
             <a:avLst/>
           </a:prstGeom>
           <a:solidFill>
-            <a:srgbClr val="00BFA5"/>
+            <a:srgbClr val="0A3370"/>
           </a:solidFill>
           <a:ln>
             <a:noFill/>
@@ -11354,6 +11529,7 @@
                 <a:solidFill>
                   <a:srgbClr val="FFFFFF"/>
                 </a:solidFill>
+                <a:latin typeface="Franklin Gothic Medium Cond"/>
               </a:rPr>
               <a:t>AI OUTPUT</a:t>
             </a:r>
@@ -11375,7 +11551,7 @@
             <a:avLst/>
           </a:prstGeom>
           <a:solidFill>
-            <a:srgbClr val="E8ECF8"/>
+            <a:srgbClr val="F0F4FA"/>
           </a:solidFill>
           <a:ln>
             <a:noFill/>
@@ -11428,7 +11604,7 @@
             <a:r>
               <a:rPr sz="1800">
                 <a:solidFill>
-                  <a:srgbClr val="444466"/>
+                  <a:srgbClr val="0A3370"/>
                 </a:solidFill>
               </a:rPr>
               <a:t>Weaknesses identified:
@@ -11481,7 +11657,7 @@
             <a:avLst/>
           </a:prstGeom>
           <a:solidFill>
-            <a:srgbClr val="6C35DE"/>
+            <a:srgbClr val="00244E"/>
           </a:solidFill>
           <a:ln>
             <a:noFill/>
@@ -11537,6 +11713,7 @@
                 <a:solidFill>
                   <a:srgbClr val="FFFFFF"/>
                 </a:solidFill>
+                <a:latin typeface="Franklin Gothic Medium Cond"/>
               </a:rPr>
               <a:t>✏️  Activity: Try It: Revision &amp; Reflection</a:t>
             </a:r>
@@ -11571,6 +11748,7 @@
                 <a:solidFill>
                   <a:srgbClr val="FFFFFF"/>
                 </a:solidFill>
+                <a:latin typeface="Franklin Gothic Medium Cond"/>
               </a:rPr>
               <a:t>⏱  8 min</a:t>
             </a:r>
@@ -11592,7 +11770,7 @@
             <a:avLst/>
           </a:prstGeom>
           <a:solidFill>
-            <a:srgbClr val="E8ECF8"/>
+            <a:srgbClr val="F0F4FA"/>
           </a:solidFill>
           <a:ln>
             <a:noFill/>
@@ -11650,8 +11828,9 @@
             <a:r>
               <a:rPr sz="2100">
                 <a:solidFill>
-                  <a:srgbClr val="1A1A2E"/>
-                </a:solidFill>
+                  <a:srgbClr val="00244E"/>
+                </a:solidFill>
+                <a:latin typeface="Franklin Gothic Medium Cond"/>
               </a:rPr>
               <a:t>Choose one of the following activities:</a:t>
             </a:r>
@@ -11665,8 +11844,9 @@
             <a:r>
               <a:rPr sz="2100">
                 <a:solidFill>
-                  <a:srgbClr val="1A1A2E"/>
-                </a:solidFill>
+                  <a:srgbClr val="00244E"/>
+                </a:solidFill>
+                <a:latin typeface="Franklin Gothic Medium Cond"/>
               </a:rPr>
               <a:t/>
             </a:r>
@@ -11680,8 +11860,9 @@
             <a:r>
               <a:rPr sz="2100">
                 <a:solidFill>
-                  <a:srgbClr val="1A1A2E"/>
-                </a:solidFill>
+                  <a:srgbClr val="00244E"/>
+                </a:solidFill>
+                <a:latin typeface="Franklin Gothic Medium Cond"/>
               </a:rPr>
               <a:t>Option A — Ask questions first:</a:t>
             </a:r>
@@ -11695,8 +11876,9 @@
             <a:r>
               <a:rPr sz="2100" b="1">
                 <a:solidFill>
-                  <a:srgbClr val="6C35DE"/>
-                </a:solidFill>
+                  <a:srgbClr val="00244E"/>
+                </a:solidFill>
+                <a:latin typeface="Franklin Gothic Medium Cond"/>
               </a:rPr>
               <a:t>→  Type: 'I want help planning my next assignment. Ask me 5 questions first.'</a:t>
             </a:r>
@@ -11710,8 +11892,9 @@
             <a:r>
               <a:rPr sz="2100" b="1">
                 <a:solidFill>
-                  <a:srgbClr val="6C35DE"/>
-                </a:solidFill>
+                  <a:srgbClr val="00244E"/>
+                </a:solidFill>
+                <a:latin typeface="Franklin Gothic Medium Cond"/>
               </a:rPr>
               <a:t>→  Answer the questions, then see how the AI's help improves.</a:t>
             </a:r>
@@ -11725,8 +11908,9 @@
             <a:r>
               <a:rPr sz="2100">
                 <a:solidFill>
-                  <a:srgbClr val="1A1A2E"/>
-                </a:solidFill>
+                  <a:srgbClr val="00244E"/>
+                </a:solidFill>
+                <a:latin typeface="Franklin Gothic Medium Cond"/>
               </a:rPr>
               <a:t/>
             </a:r>
@@ -11740,8 +11924,9 @@
             <a:r>
               <a:rPr sz="2100">
                 <a:solidFill>
-                  <a:srgbClr val="1A1A2E"/>
-                </a:solidFill>
+                  <a:srgbClr val="00244E"/>
+                </a:solidFill>
+                <a:latin typeface="Franklin Gothic Medium Cond"/>
               </a:rPr>
               <a:t>Option B — Revision loop:</a:t>
             </a:r>
@@ -11755,8 +11940,9 @@
             <a:r>
               <a:rPr sz="2100" b="1">
                 <a:solidFill>
-                  <a:srgbClr val="6C35DE"/>
-                </a:solidFill>
+                  <a:srgbClr val="00244E"/>
+                </a:solidFill>
+                <a:latin typeface="Franklin Gothic Medium Cond"/>
               </a:rPr>
               <a:t>→  Paste a sentence or paragraph you wrote recently.</a:t>
             </a:r>
@@ -11770,8 +11956,9 @@
             <a:r>
               <a:rPr sz="2100" b="1">
                 <a:solidFill>
-                  <a:srgbClr val="6C35DE"/>
-                </a:solidFill>
+                  <a:srgbClr val="00244E"/>
+                </a:solidFill>
+                <a:latin typeface="Franklin Gothic Medium Cond"/>
               </a:rPr>
               <a:t>→  Ask AI to identify weaknesses and offer a revision.</a:t>
             </a:r>
@@ -11785,8 +11972,9 @@
             <a:r>
               <a:rPr sz="2100" b="1">
                 <a:solidFill>
-                  <a:srgbClr val="6C35DE"/>
-                </a:solidFill>
+                  <a:srgbClr val="00244E"/>
+                </a:solidFill>
+                <a:latin typeface="Franklin Gothic Medium Cond"/>
               </a:rPr>
               <a:t>→  Then ask: 'Now make it 20% shorter without losing meaning.'</a:t>
             </a:r>
@@ -11800,8 +11988,9 @@
             <a:r>
               <a:rPr sz="2100">
                 <a:solidFill>
-                  <a:srgbClr val="1A1A2E"/>
-                </a:solidFill>
+                  <a:srgbClr val="00244E"/>
+                </a:solidFill>
+                <a:latin typeface="Franklin Gothic Medium Cond"/>
               </a:rPr>
               <a:t/>
             </a:r>
@@ -11815,8 +12004,9 @@
             <a:r>
               <a:rPr sz="2100">
                 <a:solidFill>
-                  <a:srgbClr val="1A1A2E"/>
-                </a:solidFill>
+                  <a:srgbClr val="00244E"/>
+                </a:solidFill>
+                <a:latin typeface="Franklin Gothic Medium Cond"/>
               </a:rPr>
               <a:t>Reflect: How did the output change when you gave more context?</a:t>
             </a:r>
@@ -11837,7 +12027,7 @@
     <p:bg>
       <p:bgPr>
         <a:solidFill>
-          <a:srgbClr val="FF6D00"/>
+          <a:srgbClr val="E28E03"/>
         </a:solidFill>
         <a:effectLst/>
       </p:bgPr>
@@ -11877,6 +12067,7 @@
                 <a:solidFill>
                   <a:srgbClr val="FFFFFF"/>
                 </a:solidFill>
+                <a:latin typeface="Franklin Gothic Medium Cond"/>
               </a:rPr>
               <a:t>4</a:t>
             </a:r>
@@ -11898,7 +12089,7 @@
             <a:avLst/>
           </a:prstGeom>
           <a:solidFill>
-            <a:srgbClr val="FFD600"/>
+            <a:srgbClr val="FDB913"/>
           </a:solidFill>
           <a:ln>
             <a:noFill/>
@@ -11952,8 +12143,9 @@
             <a:r>
               <a:rPr sz="1800" b="1" i="1">
                 <a:solidFill>
-                  <a:srgbClr val="FFD600"/>
-                </a:solidFill>
+                  <a:srgbClr val="FDB913"/>
+                </a:solidFill>
+                <a:latin typeface="Franklin Gothic Medium Cond"/>
               </a:rPr>
               <a:t>SECTION 4</a:t>
             </a:r>
@@ -11988,6 +12180,7 @@
                 <a:solidFill>
                   <a:srgbClr val="FFFFFF"/>
                 </a:solidFill>
+                <a:latin typeface="Franklin Gothic Medium Cond"/>
               </a:rPr>
               <a:t>Evaluating AI Output</a:t>
             </a:r>
@@ -12020,8 +12213,9 @@
             <a:r>
               <a:rPr sz="2200" b="0" i="1">
                 <a:solidFill>
-                  <a:srgbClr val="E8ECF8"/>
-                </a:solidFill>
+                  <a:srgbClr val="F0F4FA"/>
+                </a:solidFill>
+                <a:latin typeface="Franklin Gothic Medium Cond"/>
               </a:rPr>
               <a:t>Not all AI answers are equal — learn to tell the difference</a:t>
             </a:r>
@@ -12069,7 +12263,7 @@
             <a:avLst/>
           </a:prstGeom>
           <a:solidFill>
-            <a:srgbClr val="E91E8C"/>
+            <a:srgbClr val="E28E03"/>
           </a:solidFill>
           <a:ln>
             <a:noFill/>
@@ -12125,6 +12319,7 @@
                 <a:solidFill>
                   <a:srgbClr val="FFFFFF"/>
                 </a:solidFill>
+                <a:latin typeface="Franklin Gothic Medium Cond"/>
               </a:rPr>
               <a:t>How the Quiz Works</a:t>
             </a:r>
@@ -12157,8 +12352,9 @@
             <a:r>
               <a:rPr sz="1800" b="0" i="1">
                 <a:solidFill>
-                  <a:srgbClr val="FFD600"/>
-                </a:solidFill>
+                  <a:srgbClr val="FDB913"/>
+                </a:solidFill>
+                <a:latin typeface="Franklin Gothic Medium Cond"/>
               </a:rPr>
               <a:t>Scan the QR code — answer on your device!</a:t>
             </a:r>
@@ -12180,7 +12376,7 @@
             <a:avLst/>
           </a:prstGeom>
           <a:solidFill>
-            <a:srgbClr val="E8ECF8"/>
+            <a:srgbClr val="F0F4FA"/>
           </a:solidFill>
           <a:ln>
             <a:noFill/>
@@ -12238,8 +12434,9 @@
             <a:r>
               <a:rPr sz="2000">
                 <a:solidFill>
-                  <a:srgbClr val="1A1A2E"/>
-                </a:solidFill>
+                  <a:srgbClr val="00244E"/>
+                </a:solidFill>
+                <a:latin typeface="Franklin Gothic Medium Cond"/>
               </a:rPr>
               <a:t>📋  12 quick questions across 4 categories.</a:t>
             </a:r>
@@ -12253,8 +12450,9 @@
             <a:r>
               <a:rPr sz="2000">
                 <a:solidFill>
-                  <a:srgbClr val="1A1A2E"/>
-                </a:solidFill>
+                  <a:srgbClr val="00244E"/>
+                </a:solidFill>
+                <a:latin typeface="Franklin Gothic Medium Cond"/>
               </a:rPr>
               <a:t>🤔  Answer honestly — this is NOT graded.</a:t>
             </a:r>
@@ -12268,8 +12466,9 @@
             <a:r>
               <a:rPr sz="2000">
                 <a:solidFill>
-                  <a:srgbClr val="1A1A2E"/>
-                </a:solidFill>
+                  <a:srgbClr val="00244E"/>
+                </a:solidFill>
+                <a:latin typeface="Franklin Gothic Medium Cond"/>
               </a:rPr>
               <a:t>🤫  Results are for your reflection only.</a:t>
             </a:r>
@@ -12283,8 +12482,9 @@
             <a:r>
               <a:rPr sz="2000">
                 <a:solidFill>
-                  <a:srgbClr val="1A1A2E"/>
-                </a:solidFill>
+                  <a:srgbClr val="00244E"/>
+                </a:solidFill>
+                <a:latin typeface="Franklin Gothic Medium Cond"/>
               </a:rPr>
               <a:t>📱  Use your phone or laptop to respond.</a:t>
             </a:r>
@@ -12298,8 +12498,9 @@
             <a:r>
               <a:rPr sz="2000">
                 <a:solidFill>
-                  <a:srgbClr val="1A1A2E"/>
-                </a:solidFill>
+                  <a:srgbClr val="00244E"/>
+                </a:solidFill>
+                <a:latin typeface="Franklin Gothic Medium Cond"/>
               </a:rPr>
               <a:t>⏱   About 1–2 minutes per question.</a:t>
             </a:r>
@@ -12313,8 +12514,9 @@
             <a:r>
               <a:rPr sz="2000">
                 <a:solidFill>
-                  <a:srgbClr val="1A1A2E"/>
-                </a:solidFill>
+                  <a:srgbClr val="00244E"/>
+                </a:solidFill>
+                <a:latin typeface="Franklin Gothic Medium Cond"/>
               </a:rPr>
               <a:t>🎯  Goal: understand where you start today.</a:t>
             </a:r>
@@ -12328,8 +12530,9 @@
             <a:r>
               <a:rPr sz="2000">
                 <a:solidFill>
-                  <a:srgbClr val="1A1A2E"/>
-                </a:solidFill>
+                  <a:srgbClr val="00244E"/>
+                </a:solidFill>
+                <a:latin typeface="Franklin Gothic Medium Cond"/>
               </a:rPr>
               <a:t/>
             </a:r>
@@ -12343,8 +12546,9 @@
             <a:r>
               <a:rPr sz="2000" b="1">
                 <a:solidFill>
-                  <a:srgbClr val="E91E8C"/>
-                </a:solidFill>
+                  <a:srgbClr val="E28E03"/>
+                </a:solidFill>
+                <a:latin typeface="Franklin Gothic Medium Cond"/>
               </a:rPr>
               <a:t>Categories:</a:t>
             </a:r>
@@ -12358,8 +12562,9 @@
             <a:r>
               <a:rPr sz="2000" b="1">
                 <a:solidFill>
-                  <a:srgbClr val="6C35DE"/>
-                </a:solidFill>
+                  <a:srgbClr val="00244E"/>
+                </a:solidFill>
+                <a:latin typeface="Franklin Gothic Medium Cond"/>
               </a:rPr>
               <a:t>   AI Basics  |  Mindset  |  Prompting Clarity  |  Responsible Use</a:t>
             </a:r>
@@ -12381,7 +12586,7 @@
             <a:avLst/>
           </a:prstGeom>
           <a:solidFill>
-            <a:srgbClr val="E8ECF8"/>
+            <a:srgbClr val="F0F4FA"/>
           </a:solidFill>
           <a:ln>
             <a:noFill/>
@@ -12467,7 +12672,7 @@
             <a:avLst/>
           </a:prstGeom>
           <a:solidFill>
-            <a:srgbClr val="1A1A2E"/>
+            <a:srgbClr val="00244E"/>
           </a:solidFill>
           <a:ln>
             <a:noFill/>
@@ -12510,7 +12715,7 @@
             <a:avLst/>
           </a:prstGeom>
           <a:solidFill>
-            <a:srgbClr val="E8ECF8"/>
+            <a:srgbClr val="F0F4FA"/>
           </a:solidFill>
           <a:ln>
             <a:noFill/>
@@ -12553,7 +12758,7 @@
             <a:avLst/>
           </a:prstGeom>
           <a:solidFill>
-            <a:srgbClr val="1A1A2E"/>
+            <a:srgbClr val="00244E"/>
           </a:solidFill>
           <a:ln>
             <a:noFill/>
@@ -12596,7 +12801,7 @@
             <a:avLst/>
           </a:prstGeom>
           <a:solidFill>
-            <a:srgbClr val="E8ECF8"/>
+            <a:srgbClr val="F0F4FA"/>
           </a:solidFill>
           <a:ln>
             <a:noFill/>
@@ -12639,7 +12844,7 @@
             <a:avLst/>
           </a:prstGeom>
           <a:solidFill>
-            <a:srgbClr val="1A1A2E"/>
+            <a:srgbClr val="00244E"/>
           </a:solidFill>
           <a:ln>
             <a:noFill/>
@@ -12682,7 +12887,7 @@
             <a:avLst/>
           </a:prstGeom>
           <a:solidFill>
-            <a:srgbClr val="E8ECF8"/>
+            <a:srgbClr val="F0F4FA"/>
           </a:solidFill>
           <a:ln>
             <a:noFill/>
@@ -12725,7 +12930,7 @@
             <a:avLst/>
           </a:prstGeom>
           <a:solidFill>
-            <a:srgbClr val="1A1A2E"/>
+            <a:srgbClr val="00244E"/>
           </a:solidFill>
           <a:ln>
             <a:noFill/>
@@ -12768,7 +12973,7 @@
             <a:avLst/>
           </a:prstGeom>
           <a:solidFill>
-            <a:srgbClr val="E8ECF8"/>
+            <a:srgbClr val="F0F4FA"/>
           </a:solidFill>
           <a:ln>
             <a:noFill/>
@@ -12811,7 +13016,7 @@
             <a:avLst/>
           </a:prstGeom>
           <a:solidFill>
-            <a:srgbClr val="E8ECF8"/>
+            <a:srgbClr val="F0F4FA"/>
           </a:solidFill>
           <a:ln>
             <a:noFill/>
@@ -12865,8 +13070,9 @@
             <a:r>
               <a:rPr sz="1800" b="1" i="0">
                 <a:solidFill>
-                  <a:srgbClr val="E91E8C"/>
-                </a:solidFill>
+                  <a:srgbClr val="E28E03"/>
+                </a:solidFill>
+                <a:latin typeface="Franklin Gothic Medium Cond"/>
               </a:rPr>
               <a:t>SCAN ME</a:t>
             </a:r>
@@ -12899,8 +13105,9 @@
             <a:r>
               <a:rPr sz="1300" b="0" i="1">
                 <a:solidFill>
-                  <a:srgbClr val="444466"/>
-                </a:solidFill>
+                  <a:srgbClr val="0A3370"/>
+                </a:solidFill>
+                <a:latin typeface="Franklin Gothic Medium Cond"/>
               </a:rPr>
               <a:t>Place your quiz link / Mentimeter /
 Poll Everywhere QR code here</a:t>
@@ -12949,7 +13156,7 @@
             <a:avLst/>
           </a:prstGeom>
           <a:solidFill>
-            <a:srgbClr val="FF6D00"/>
+            <a:srgbClr val="E28E03"/>
           </a:solidFill>
           <a:ln>
             <a:noFill/>
@@ -13005,6 +13212,7 @@
                 <a:solidFill>
                   <a:srgbClr val="FFFFFF"/>
                 </a:solidFill>
+                <a:latin typeface="Franklin Gothic Medium Cond"/>
               </a:rPr>
               <a:t>Why Different AI Tools Give Different Answers</a:t>
             </a:r>
@@ -13037,8 +13245,9 @@
             <a:r>
               <a:rPr sz="1800" b="0" i="1">
                 <a:solidFill>
-                  <a:srgbClr val="E8ECF8"/>
-                </a:solidFill>
+                  <a:srgbClr val="F0F4FA"/>
+                </a:solidFill>
+                <a:latin typeface="Franklin Gothic Medium Cond"/>
               </a:rPr>
               <a:t>Same question, different outputs — here's why</a:t>
             </a:r>
@@ -13060,7 +13269,7 @@
             <a:avLst/>
           </a:prstGeom>
           <a:solidFill>
-            <a:srgbClr val="FF6D00"/>
+            <a:srgbClr val="E28E03"/>
           </a:solidFill>
           <a:ln>
             <a:noFill/>
@@ -13116,6 +13325,7 @@
                 <a:solidFill>
                   <a:srgbClr val="FFFFFF"/>
                 </a:solidFill>
+                <a:latin typeface="Franklin Gothic Medium Cond"/>
               </a:rPr>
               <a:t>🗂️ Different Training Data</a:t>
             </a:r>
@@ -13149,6 +13359,7 @@
                 <a:solidFill>
                   <a:srgbClr val="FFFFFF"/>
                 </a:solidFill>
+                <a:latin typeface="Franklin Gothic Medium Cond"/>
               </a:rPr>
               <a:t>Each AI model is trained on different datasets with different time cutoffs, languages, and sources of information.</a:t>
             </a:r>
@@ -13170,7 +13381,7 @@
             <a:avLst/>
           </a:prstGeom>
           <a:solidFill>
-            <a:srgbClr val="6C35DE"/>
+            <a:srgbClr val="00244E"/>
           </a:solidFill>
           <a:ln>
             <a:noFill/>
@@ -13226,6 +13437,7 @@
                 <a:solidFill>
                   <a:srgbClr val="FFFFFF"/>
                 </a:solidFill>
+                <a:latin typeface="Franklin Gothic Medium Cond"/>
               </a:rPr>
               <a:t>🏗️ Different Model Architecture</a:t>
             </a:r>
@@ -13259,6 +13471,7 @@
                 <a:solidFill>
                   <a:srgbClr val="FFFFFF"/>
                 </a:solidFill>
+                <a:latin typeface="Franklin Gothic Medium Cond"/>
               </a:rPr>
               <a:t>GPT-4, Gemini, Claude, and Llama use different underlying approaches to language modelling — producing different styles and strengths.</a:t>
             </a:r>
@@ -13280,7 +13493,7 @@
             <a:avLst/>
           </a:prstGeom>
           <a:solidFill>
-            <a:srgbClr val="228BE6"/>
+            <a:srgbClr val="009DEA"/>
           </a:solidFill>
           <a:ln>
             <a:noFill/>
@@ -13336,6 +13549,7 @@
                 <a:solidFill>
                   <a:srgbClr val="FFFFFF"/>
                 </a:solidFill>
+                <a:latin typeface="Franklin Gothic Medium Cond"/>
               </a:rPr>
               <a:t>🔧 Different System Prompts</a:t>
             </a:r>
@@ -13369,6 +13583,7 @@
                 <a:solidFill>
                   <a:srgbClr val="FFFFFF"/>
                 </a:solidFill>
+                <a:latin typeface="Franklin Gothic Medium Cond"/>
               </a:rPr>
               <a:t>Every AI product has hidden instructions shaping tone, safety limits, and focus areas — you don't always see these.</a:t>
             </a:r>
@@ -13390,7 +13605,7 @@
             <a:avLst/>
           </a:prstGeom>
           <a:solidFill>
-            <a:srgbClr val="00BFA5"/>
+            <a:srgbClr val="0A3370"/>
           </a:solidFill>
           <a:ln>
             <a:noFill/>
@@ -13446,6 +13661,7 @@
                 <a:solidFill>
                   <a:srgbClr val="FFFFFF"/>
                 </a:solidFill>
+                <a:latin typeface="Franklin Gothic Medium Cond"/>
               </a:rPr>
               <a:t>🎲 Randomness (Temperature)</a:t>
             </a:r>
@@ -13479,6 +13695,7 @@
                 <a:solidFill>
                   <a:srgbClr val="FFFFFF"/>
                 </a:solidFill>
+                <a:latin typeface="Franklin Gothic Medium Cond"/>
               </a:rPr>
               <a:t>AI responses include controlled randomness. Run the same prompt twice and you may get different outputs.</a:t>
             </a:r>
@@ -13500,7 +13717,7 @@
             <a:avLst/>
           </a:prstGeom>
           <a:solidFill>
-            <a:srgbClr val="E91E8C"/>
+            <a:srgbClr val="E28E03"/>
           </a:solidFill>
           <a:ln>
             <a:noFill/>
@@ -13556,6 +13773,7 @@
                 <a:solidFill>
                   <a:srgbClr val="FFFFFF"/>
                 </a:solidFill>
+                <a:latin typeface="Franklin Gothic Medium Cond"/>
               </a:rPr>
               <a:t>📏 Context Length</a:t>
             </a:r>
@@ -13589,6 +13807,7 @@
                 <a:solidFill>
                   <a:srgbClr val="FFFFFF"/>
                 </a:solidFill>
+                <a:latin typeface="Franklin Gothic Medium Cond"/>
               </a:rPr>
               <a:t>Some tools handle longer conversations or documents better than others, affecting quality in extended tasks.</a:t>
             </a:r>
@@ -13636,7 +13855,7 @@
             <a:avLst/>
           </a:prstGeom>
           <a:solidFill>
-            <a:srgbClr val="228BE6"/>
+            <a:srgbClr val="009DEA"/>
           </a:solidFill>
           <a:ln>
             <a:noFill/>
@@ -13692,6 +13911,7 @@
                 <a:solidFill>
                   <a:srgbClr val="FFFFFF"/>
                 </a:solidFill>
+                <a:latin typeface="Franklin Gothic Medium Cond"/>
               </a:rPr>
               <a:t>AI Output Evaluation Checklist</a:t>
             </a:r>
@@ -13724,8 +13944,9 @@
             <a:r>
               <a:rPr sz="1800" b="0" i="1">
                 <a:solidFill>
-                  <a:srgbClr val="E8ECF8"/>
-                </a:solidFill>
+                  <a:srgbClr val="F0F4FA"/>
+                </a:solidFill>
+                <a:latin typeface="Franklin Gothic Medium Cond"/>
               </a:rPr>
               <a:t>Use this every time before you trust or submit AI content</a:t>
             </a:r>
@@ -13747,7 +13968,7 @@
             <a:avLst/>
           </a:prstGeom>
           <a:solidFill>
-            <a:srgbClr val="E91E8C"/>
+            <a:srgbClr val="E28E03"/>
           </a:solidFill>
           <a:ln>
             <a:noFill/>
@@ -13803,6 +14024,7 @@
                 <a:solidFill>
                   <a:srgbClr val="FFFFFF"/>
                 </a:solidFill>
+                <a:latin typeface="Franklin Gothic Medium Cond"/>
               </a:rPr>
               <a:t>☐  Accuracy</a:t>
             </a:r>
@@ -13836,6 +14058,7 @@
                 <a:solidFill>
                   <a:srgbClr val="FFFFFF"/>
                 </a:solidFill>
+                <a:latin typeface="Franklin Gothic Medium Cond"/>
               </a:rPr>
               <a:t>Can you verify key facts from a reliable primary source?</a:t>
             </a:r>
@@ -13857,7 +14080,7 @@
             <a:avLst/>
           </a:prstGeom>
           <a:solidFill>
-            <a:srgbClr val="FF6D00"/>
+            <a:srgbClr val="E28E03"/>
           </a:solidFill>
           <a:ln>
             <a:noFill/>
@@ -13913,6 +14136,7 @@
                 <a:solidFill>
                   <a:srgbClr val="FFFFFF"/>
                 </a:solidFill>
+                <a:latin typeface="Franklin Gothic Medium Cond"/>
               </a:rPr>
               <a:t>☐  Bias</a:t>
             </a:r>
@@ -13946,6 +14170,7 @@
                 <a:solidFill>
                   <a:srgbClr val="FFFFFF"/>
                 </a:solidFill>
+                <a:latin typeface="Franklin Gothic Medium Cond"/>
               </a:rPr>
               <a:t>Does the response favour one perspective unfairly?</a:t>
             </a:r>
@@ -13967,7 +14192,7 @@
             <a:avLst/>
           </a:prstGeom>
           <a:solidFill>
-            <a:srgbClr val="6C35DE"/>
+            <a:srgbClr val="00244E"/>
           </a:solidFill>
           <a:ln>
             <a:noFill/>
@@ -14023,6 +14248,7 @@
                 <a:solidFill>
                   <a:srgbClr val="FFFFFF"/>
                 </a:solidFill>
+                <a:latin typeface="Franklin Gothic Medium Cond"/>
               </a:rPr>
               <a:t>☐  Missing Citations</a:t>
             </a:r>
@@ -14056,6 +14282,7 @@
                 <a:solidFill>
                   <a:srgbClr val="FFFFFF"/>
                 </a:solidFill>
+                <a:latin typeface="Franklin Gothic Medium Cond"/>
               </a:rPr>
               <a:t>Are sources named? Are they real and accessible?</a:t>
             </a:r>
@@ -14077,7 +14304,7 @@
             <a:avLst/>
           </a:prstGeom>
           <a:solidFill>
-            <a:srgbClr val="228BE6"/>
+            <a:srgbClr val="009DEA"/>
           </a:solidFill>
           <a:ln>
             <a:noFill/>
@@ -14133,6 +14360,7 @@
                 <a:solidFill>
                   <a:srgbClr val="FFFFFF"/>
                 </a:solidFill>
+                <a:latin typeface="Franklin Gothic Medium Cond"/>
               </a:rPr>
               <a:t>☐  Clarity</a:t>
             </a:r>
@@ -14166,6 +14394,7 @@
                 <a:solidFill>
                   <a:srgbClr val="FFFFFF"/>
                 </a:solidFill>
+                <a:latin typeface="Franklin Gothic Medium Cond"/>
               </a:rPr>
               <a:t>Is the language clear, relevant, and appropriate for your audience?</a:t>
             </a:r>
@@ -14187,7 +14416,7 @@
             <a:avLst/>
           </a:prstGeom>
           <a:solidFill>
-            <a:srgbClr val="00BFA5"/>
+            <a:srgbClr val="0A3370"/>
           </a:solidFill>
           <a:ln>
             <a:noFill/>
@@ -14243,6 +14472,7 @@
                 <a:solidFill>
                   <a:srgbClr val="FFFFFF"/>
                 </a:solidFill>
+                <a:latin typeface="Franklin Gothic Medium Cond"/>
               </a:rPr>
               <a:t>☐  Cultural Relevance</a:t>
             </a:r>
@@ -14276,6 +14506,7 @@
                 <a:solidFill>
                   <a:srgbClr val="FFFFFF"/>
                 </a:solidFill>
+                <a:latin typeface="Franklin Gothic Medium Cond"/>
               </a:rPr>
               <a:t>Does it account for your cultural or regional context?</a:t>
             </a:r>
@@ -14297,7 +14528,7 @@
             <a:avLst/>
           </a:prstGeom>
           <a:solidFill>
-            <a:srgbClr val="00C853"/>
+            <a:srgbClr val="009DEA"/>
           </a:solidFill>
           <a:ln>
             <a:noFill/>
@@ -14353,6 +14584,7 @@
                 <a:solidFill>
                   <a:srgbClr val="FFFFFF"/>
                 </a:solidFill>
+                <a:latin typeface="Franklin Gothic Medium Cond"/>
               </a:rPr>
               <a:t>☐  Completeness</a:t>
             </a:r>
@@ -14386,6 +14618,7 @@
                 <a:solidFill>
                   <a:srgbClr val="FFFFFF"/>
                 </a:solidFill>
+                <a:latin typeface="Franklin Gothic Medium Cond"/>
               </a:rPr>
               <a:t>Does it fully address your question, or are there gaps?</a:t>
             </a:r>
@@ -14433,7 +14666,7 @@
             <a:avLst/>
           </a:prstGeom>
           <a:solidFill>
-            <a:srgbClr val="E91E8C"/>
+            <a:srgbClr val="E28E03"/>
           </a:solidFill>
           <a:ln>
             <a:noFill/>
@@ -14489,6 +14722,7 @@
                 <a:solidFill>
                   <a:srgbClr val="FFFFFF"/>
                 </a:solidFill>
+                <a:latin typeface="Franklin Gothic Medium Cond"/>
               </a:rPr>
               <a:t>Practice: Spot the Errors</a:t>
             </a:r>
@@ -14521,8 +14755,9 @@
             <a:r>
               <a:rPr sz="1800" b="0" i="1">
                 <a:solidFill>
-                  <a:srgbClr val="E8ECF8"/>
-                </a:solidFill>
+                  <a:srgbClr val="F0F4FA"/>
+                </a:solidFill>
+                <a:latin typeface="Franklin Gothic Medium Cond"/>
               </a:rPr>
               <a:t>Read this AI output — how many problems can you find?</a:t>
             </a:r>
@@ -14544,7 +14779,7 @@
             <a:avLst/>
           </a:prstGeom>
           <a:solidFill>
-            <a:srgbClr val="E8ECF8"/>
+            <a:srgbClr val="F0F4FA"/>
           </a:solidFill>
           <a:ln>
             <a:noFill/>
@@ -14598,8 +14833,9 @@
             <a:r>
               <a:rPr sz="1500" b="1" i="0">
                 <a:solidFill>
-                  <a:srgbClr val="E91E8C"/>
-                </a:solidFill>
+                  <a:srgbClr val="E28E03"/>
+                </a:solidFill>
+                <a:latin typeface="Franklin Gothic Medium Cond"/>
               </a:rPr>
               <a:t>AI OUTPUT (contains deliberate errors):</a:t>
             </a:r>
@@ -14631,8 +14867,9 @@
             <a:r>
               <a:rPr sz="2000" i="1">
                 <a:solidFill>
-                  <a:srgbClr val="1A1A2E"/>
-                </a:solidFill>
+                  <a:srgbClr val="00244E"/>
+                </a:solidFill>
+                <a:latin typeface="Franklin Gothic Medium Cond"/>
               </a:rPr>
               <a:t>The United Nations was founded in 1945 by Franklin D. Roosevelt and Winston Churchill at the Geneva Conference. It currently has 184 member states. The UN's primary goal is to prevent wars and promote peace worldwide. Its headquarters are located in Paris, France. The Secretary-General serves a 3-year term. The UN Security Council has 7 permanent members including the USA, UK, France, Russia, and China.</a:t>
             </a:r>
@@ -14654,7 +14891,7 @@
             <a:avLst/>
           </a:prstGeom>
           <a:solidFill>
-            <a:srgbClr val="FF6D00"/>
+            <a:srgbClr val="E28E03"/>
           </a:solidFill>
           <a:ln>
             <a:noFill/>
@@ -14710,6 +14947,7 @@
                 <a:solidFill>
                   <a:srgbClr val="FFFFFF"/>
                 </a:solidFill>
+                <a:latin typeface="Franklin Gothic Medium Cond"/>
               </a:rPr>
               <a:t>❓  Errors to find — discuss with a partner, then reveal!</a:t>
             </a:r>
@@ -14744,6 +14982,7 @@
                 <a:solidFill>
                   <a:srgbClr val="FFFFFF"/>
                 </a:solidFill>
+                <a:latin typeface="Franklin Gothic Medium Cond"/>
               </a:rPr>
               <a:t>Answers: ① Geneva → San Francisco  ② 184 → 193 members  ③ Paris → New York  ④ 3-year → 5-year term  ⑤ 7 → 5 permanent members</a:t>
             </a:r>
@@ -14764,7 +15003,7 @@
     <p:bg>
       <p:bgPr>
         <a:solidFill>
-          <a:srgbClr val="00C853"/>
+          <a:srgbClr val="009DEA"/>
         </a:solidFill>
         <a:effectLst/>
       </p:bgPr>
@@ -14804,6 +15043,7 @@
                 <a:solidFill>
                   <a:srgbClr val="FFFFFF"/>
                 </a:solidFill>
+                <a:latin typeface="Franklin Gothic Medium Cond"/>
               </a:rPr>
               <a:t>5</a:t>
             </a:r>
@@ -14825,7 +15065,7 @@
             <a:avLst/>
           </a:prstGeom>
           <a:solidFill>
-            <a:srgbClr val="FFD600"/>
+            <a:srgbClr val="FDB913"/>
           </a:solidFill>
           <a:ln>
             <a:noFill/>
@@ -14879,8 +15119,9 @@
             <a:r>
               <a:rPr sz="1800" b="1" i="1">
                 <a:solidFill>
-                  <a:srgbClr val="FFD600"/>
-                </a:solidFill>
+                  <a:srgbClr val="FDB913"/>
+                </a:solidFill>
+                <a:latin typeface="Franklin Gothic Medium Cond"/>
               </a:rPr>
               <a:t>SECTION 5</a:t>
             </a:r>
@@ -14915,6 +15156,7 @@
                 <a:solidFill>
                   <a:srgbClr val="FFFFFF"/>
                 </a:solidFill>
+                <a:latin typeface="Franklin Gothic Medium Cond"/>
               </a:rPr>
               <a:t>AI Guidelines &amp; Responsible Use</a:t>
             </a:r>
@@ -14947,8 +15189,9 @@
             <a:r>
               <a:rPr sz="2200" b="0" i="1">
                 <a:solidFill>
-                  <a:srgbClr val="E8ECF8"/>
-                </a:solidFill>
+                  <a:srgbClr val="F0F4FA"/>
+                </a:solidFill>
+                <a:latin typeface="Franklin Gothic Medium Cond"/>
               </a:rPr>
               <a:t>Know the rules — protect yourself and others</a:t>
             </a:r>
@@ -14996,7 +15239,7 @@
             <a:avLst/>
           </a:prstGeom>
           <a:solidFill>
-            <a:srgbClr val="00BFA5"/>
+            <a:srgbClr val="0A3370"/>
           </a:solidFill>
           <a:ln>
             <a:noFill/>
@@ -15052,6 +15295,7 @@
                 <a:solidFill>
                   <a:srgbClr val="FFFFFF"/>
                 </a:solidFill>
+                <a:latin typeface="Franklin Gothic Medium Cond"/>
               </a:rPr>
               <a:t>When AI IS Allowed in Academic Settings</a:t>
             </a:r>
@@ -15084,8 +15328,9 @@
             <a:r>
               <a:rPr sz="1800" b="0" i="1">
                 <a:solidFill>
-                  <a:srgbClr val="E8ECF8"/>
-                </a:solidFill>
+                  <a:srgbClr val="F0F4FA"/>
+                </a:solidFill>
+                <a:latin typeface="Franklin Gothic Medium Cond"/>
               </a:rPr>
               <a:t>Always check your institution's specific policy first</a:t>
             </a:r>
@@ -15122,8 +15367,9 @@
             <a:r>
               <a:rPr sz="2100">
                 <a:solidFill>
-                  <a:srgbClr val="00BFA5"/>
-                </a:solidFill>
+                  <a:srgbClr val="0A3370"/>
+                </a:solidFill>
+                <a:latin typeface="Franklin Gothic Medium Cond"/>
               </a:rPr>
               <a:t>✓  Brainstorming and generating initial ideas (with disclosure)</a:t>
             </a:r>
@@ -15137,8 +15383,9 @@
             <a:r>
               <a:rPr sz="2100">
                 <a:solidFill>
-                  <a:srgbClr val="00BFA5"/>
-                </a:solidFill>
+                  <a:srgbClr val="0A3370"/>
+                </a:solidFill>
+                <a:latin typeface="Franklin Gothic Medium Cond"/>
               </a:rPr>
               <a:t>✓  Improving grammar and clarity of your own draft</a:t>
             </a:r>
@@ -15152,8 +15399,9 @@
             <a:r>
               <a:rPr sz="2100">
                 <a:solidFill>
-                  <a:srgbClr val="00BFA5"/>
-                </a:solidFill>
+                  <a:srgbClr val="0A3370"/>
+                </a:solidFill>
+                <a:latin typeface="Franklin Gothic Medium Cond"/>
               </a:rPr>
               <a:t>✓  Translating content to better understand a source</a:t>
             </a:r>
@@ -15167,8 +15415,9 @@
             <a:r>
               <a:rPr sz="2100">
                 <a:solidFill>
-                  <a:srgbClr val="00BFA5"/>
-                </a:solidFill>
+                  <a:srgbClr val="0A3370"/>
+                </a:solidFill>
+                <a:latin typeface="Franklin Gothic Medium Cond"/>
               </a:rPr>
               <a:t>✓  Summarising readings to aid comprehension</a:t>
             </a:r>
@@ -15182,8 +15431,9 @@
             <a:r>
               <a:rPr sz="2100">
                 <a:solidFill>
-                  <a:srgbClr val="00BFA5"/>
-                </a:solidFill>
+                  <a:srgbClr val="0A3370"/>
+                </a:solidFill>
+                <a:latin typeface="Franklin Gothic Medium Cond"/>
               </a:rPr>
               <a:t>✓  Generating practice questions or study guides</a:t>
             </a:r>
@@ -15197,8 +15447,9 @@
             <a:r>
               <a:rPr sz="2100">
                 <a:solidFill>
-                  <a:srgbClr val="00BFA5"/>
-                </a:solidFill>
+                  <a:srgbClr val="0A3370"/>
+                </a:solidFill>
+                <a:latin typeface="Franklin Gothic Medium Cond"/>
               </a:rPr>
               <a:t>✓  Getting feedback on structure or argument strength</a:t>
             </a:r>
@@ -15212,8 +15463,9 @@
             <a:r>
               <a:rPr sz="2100">
                 <a:solidFill>
-                  <a:srgbClr val="00BFA5"/>
-                </a:solidFill>
+                  <a:srgbClr val="0A3370"/>
+                </a:solidFill>
+                <a:latin typeface="Franklin Gothic Medium Cond"/>
               </a:rPr>
               <a:t>✓  Learning new concepts through interactive explanation</a:t>
             </a:r>
@@ -15261,7 +15513,7 @@
             <a:avLst/>
           </a:prstGeom>
           <a:solidFill>
-            <a:srgbClr val="E91E8C"/>
+            <a:srgbClr val="E28E03"/>
           </a:solidFill>
           <a:ln>
             <a:noFill/>
@@ -15317,6 +15569,7 @@
                 <a:solidFill>
                   <a:srgbClr val="FFFFFF"/>
                 </a:solidFill>
+                <a:latin typeface="Franklin Gothic Medium Cond"/>
               </a:rPr>
               <a:t>When AI is NOT Allowed</a:t>
             </a:r>
@@ -15349,8 +15602,9 @@
             <a:r>
               <a:rPr sz="1800" b="0" i="1">
                 <a:solidFill>
-                  <a:srgbClr val="E8ECF8"/>
-                </a:solidFill>
+                  <a:srgbClr val="F0F4FA"/>
+                </a:solidFill>
+                <a:latin typeface="Franklin Gothic Medium Cond"/>
               </a:rPr>
               <a:t>Academic integrity applies to AI — misuse has serious consequences</a:t>
             </a:r>
@@ -15387,8 +15641,9 @@
             <a:r>
               <a:rPr sz="2100">
                 <a:solidFill>
-                  <a:srgbClr val="E91E8C"/>
-                </a:solidFill>
+                  <a:srgbClr val="E28E03"/>
+                </a:solidFill>
+                <a:latin typeface="Franklin Gothic Medium Cond"/>
               </a:rPr>
               <a:t>✗  Generating entire assignments or essays for submission</a:t>
             </a:r>
@@ -15402,8 +15657,9 @@
             <a:r>
               <a:rPr sz="2100">
                 <a:solidFill>
-                  <a:srgbClr val="E91E8C"/>
-                </a:solidFill>
+                  <a:srgbClr val="E28E03"/>
+                </a:solidFill>
+                <a:latin typeface="Franklin Gothic Medium Cond"/>
               </a:rPr>
               <a:t>✗  Completing exams, quizzes, or timed assessments</a:t>
             </a:r>
@@ -15417,8 +15673,9 @@
             <a:r>
               <a:rPr sz="2100">
                 <a:solidFill>
-                  <a:srgbClr val="E91E8C"/>
-                </a:solidFill>
+                  <a:srgbClr val="E28E03"/>
+                </a:solidFill>
+                <a:latin typeface="Franklin Gothic Medium Cond"/>
               </a:rPr>
               <a:t>✗  Writing lab reports, reflections, or personal statements</a:t>
             </a:r>
@@ -15432,8 +15689,9 @@
             <a:r>
               <a:rPr sz="2100">
                 <a:solidFill>
-                  <a:srgbClr val="E91E8C"/>
-                </a:solidFill>
+                  <a:srgbClr val="E28E03"/>
+                </a:solidFill>
+                <a:latin typeface="Franklin Gothic Medium Cond"/>
               </a:rPr>
               <a:t>✗  Paraphrasing AI content to disguise AI origin</a:t>
             </a:r>
@@ -15447,8 +15705,9 @@
             <a:r>
               <a:rPr sz="2100">
                 <a:solidFill>
-                  <a:srgbClr val="E91E8C"/>
-                </a:solidFill>
+                  <a:srgbClr val="E28E03"/>
+                </a:solidFill>
+                <a:latin typeface="Franklin Gothic Medium Cond"/>
               </a:rPr>
               <a:t>✗  Using AI to complete peer evaluations or feedback forms</a:t>
             </a:r>
@@ -15462,8 +15721,9 @@
             <a:r>
               <a:rPr sz="2100">
                 <a:solidFill>
-                  <a:srgbClr val="E91E8C"/>
-                </a:solidFill>
+                  <a:srgbClr val="E28E03"/>
+                </a:solidFill>
+                <a:latin typeface="Franklin Gothic Medium Cond"/>
               </a:rPr>
               <a:t>✗  Any situation where your instructor has explicitly prohibited it</a:t>
             </a:r>
@@ -15477,8 +15737,9 @@
             <a:r>
               <a:rPr sz="2100">
                 <a:solidFill>
-                  <a:srgbClr val="E91E8C"/>
-                </a:solidFill>
+                  <a:srgbClr val="E28E03"/>
+                </a:solidFill>
+                <a:latin typeface="Franklin Gothic Medium Cond"/>
               </a:rPr>
               <a:t>✗  Presenting AI output as entirely your own original thinking</a:t>
             </a:r>
@@ -15526,7 +15787,7 @@
             <a:avLst/>
           </a:prstGeom>
           <a:solidFill>
-            <a:srgbClr val="6C35DE"/>
+            <a:srgbClr val="00244E"/>
           </a:solidFill>
           <a:ln>
             <a:noFill/>
@@ -15582,6 +15843,7 @@
                 <a:solidFill>
                   <a:srgbClr val="FFFFFF"/>
                 </a:solidFill>
+                <a:latin typeface="Franklin Gothic Medium Cond"/>
               </a:rPr>
               <a:t>Privacy, Safety &amp; Personal Data</a:t>
             </a:r>
@@ -15614,8 +15876,9 @@
             <a:r>
               <a:rPr sz="1800" b="0" i="1">
                 <a:solidFill>
-                  <a:srgbClr val="E8ECF8"/>
-                </a:solidFill>
+                  <a:srgbClr val="F0F4FA"/>
+                </a:solidFill>
+                <a:latin typeface="Franklin Gothic Medium Cond"/>
               </a:rPr>
               <a:t>What you share with AI is not always private</a:t>
             </a:r>
@@ -15637,7 +15900,7 @@
             <a:avLst/>
           </a:prstGeom>
           <a:solidFill>
-            <a:srgbClr val="E91E8C"/>
+            <a:srgbClr val="E28E03"/>
           </a:solidFill>
           <a:ln>
             <a:noFill/>
@@ -15693,6 +15956,7 @@
                 <a:solidFill>
                   <a:srgbClr val="FFFFFF"/>
                 </a:solidFill>
+                <a:latin typeface="Franklin Gothic Medium Cond"/>
               </a:rPr>
               <a:t>🔒 Never Share</a:t>
             </a:r>
@@ -15731,6 +15995,7 @@
                 <a:solidFill>
                   <a:srgbClr val="FFFFFF"/>
                 </a:solidFill>
+                <a:latin typeface="Franklin Gothic Medium Cond"/>
               </a:rPr>
               <a:t>▸  Passport, ID, or social security numbers</a:t>
             </a:r>
@@ -15746,6 +16011,7 @@
                 <a:solidFill>
                   <a:srgbClr val="FFFFFF"/>
                 </a:solidFill>
+                <a:latin typeface="Franklin Gothic Medium Cond"/>
               </a:rPr>
               <a:t>▸  Bank details, card numbers, or financial data</a:t>
             </a:r>
@@ -15761,6 +16027,7 @@
                 <a:solidFill>
                   <a:srgbClr val="FFFFFF"/>
                 </a:solidFill>
+                <a:latin typeface="Franklin Gothic Medium Cond"/>
               </a:rPr>
               <a:t>▸  Medical records or health information</a:t>
             </a:r>
@@ -15776,6 +16043,7 @@
                 <a:solidFill>
                   <a:srgbClr val="FFFFFF"/>
                 </a:solidFill>
+                <a:latin typeface="Franklin Gothic Medium Cond"/>
               </a:rPr>
               <a:t>▸  Passwords or account credentials</a:t>
             </a:r>
@@ -15791,6 +16059,7 @@
                 <a:solidFill>
                   <a:srgbClr val="FFFFFF"/>
                 </a:solidFill>
+                <a:latin typeface="Franklin Gothic Medium Cond"/>
               </a:rPr>
               <a:t>▸  Classmates' personal information or work</a:t>
             </a:r>
@@ -15812,7 +16081,7 @@
             <a:avLst/>
           </a:prstGeom>
           <a:solidFill>
-            <a:srgbClr val="FF6D00"/>
+            <a:srgbClr val="E28E03"/>
           </a:solidFill>
           <a:ln>
             <a:noFill/>
@@ -15868,6 +16137,7 @@
                 <a:solidFill>
                   <a:srgbClr val="FFFFFF"/>
                 </a:solidFill>
+                <a:latin typeface="Franklin Gothic Medium Cond"/>
               </a:rPr>
               <a:t>⚠️ Be Cautious With</a:t>
             </a:r>
@@ -15906,6 +16176,7 @@
                 <a:solidFill>
                   <a:srgbClr val="FFFFFF"/>
                 </a:solidFill>
+                <a:latin typeface="Franklin Gothic Medium Cond"/>
               </a:rPr>
               <a:t>▸  Your full name combined with location</a:t>
             </a:r>
@@ -15921,6 +16192,7 @@
                 <a:solidFill>
                   <a:srgbClr val="FFFFFF"/>
                 </a:solidFill>
+                <a:latin typeface="Franklin Gothic Medium Cond"/>
               </a:rPr>
               <a:t>▸  Details about your mental health or personal struggles</a:t>
             </a:r>
@@ -15936,6 +16208,7 @@
                 <a:solidFill>
                   <a:srgbClr val="FFFFFF"/>
                 </a:solidFill>
+                <a:latin typeface="Franklin Gothic Medium Cond"/>
               </a:rPr>
               <a:t>▸  Confidential course materials (copyrighted content)</a:t>
             </a:r>
@@ -15951,6 +16224,7 @@
                 <a:solidFill>
                   <a:srgbClr val="FFFFFF"/>
                 </a:solidFill>
+                <a:latin typeface="Franklin Gothic Medium Cond"/>
               </a:rPr>
               <a:t>▸  Sensitive family or relationship information</a:t>
             </a:r>
@@ -15966,6 +16240,7 @@
                 <a:solidFill>
                   <a:srgbClr val="FFFFFF"/>
                 </a:solidFill>
+                <a:latin typeface="Franklin Gothic Medium Cond"/>
               </a:rPr>
               <a:t>▸  Unpublished research data</a:t>
             </a:r>
@@ -16013,7 +16288,7 @@
             <a:avLst/>
           </a:prstGeom>
           <a:solidFill>
-            <a:srgbClr val="6C35DE"/>
+            <a:srgbClr val="00244E"/>
           </a:solidFill>
           <a:ln>
             <a:noFill/>
@@ -16069,6 +16344,7 @@
                 <a:solidFill>
                   <a:srgbClr val="FFFFFF"/>
                 </a:solidFill>
+                <a:latin typeface="Franklin Gothic Medium Cond"/>
               </a:rPr>
               <a:t>Ethical Use: Learning vs. Shortcuts</a:t>
             </a:r>
@@ -16101,8 +16377,9 @@
             <a:r>
               <a:rPr sz="1800" b="0" i="1">
                 <a:solidFill>
-                  <a:srgbClr val="E8ECF8"/>
-                </a:solidFill>
+                  <a:srgbClr val="F0F4FA"/>
+                </a:solidFill>
+                <a:latin typeface="Franklin Gothic Medium Cond"/>
               </a:rPr>
               <a:t>The difference is whether YOU are growing</a:t>
             </a:r>
@@ -16124,7 +16401,7 @@
             <a:avLst/>
           </a:prstGeom>
           <a:solidFill>
-            <a:srgbClr val="00BFA5"/>
+            <a:srgbClr val="0A3370"/>
           </a:solidFill>
           <a:ln>
             <a:noFill/>
@@ -16180,6 +16457,7 @@
                 <a:solidFill>
                   <a:srgbClr val="FFFFFF"/>
                 </a:solidFill>
+                <a:latin typeface="Franklin Gothic Medium Cond"/>
               </a:rPr>
               <a:t>✅  Using AI to LEARN</a:t>
             </a:r>
@@ -16218,6 +16496,7 @@
                 <a:solidFill>
                   <a:srgbClr val="FFFFFF"/>
                 </a:solidFill>
+                <a:latin typeface="Franklin Gothic Medium Cond"/>
               </a:rPr>
               <a:t>▸  Ask AI to explain a concept, then test yourself</a:t>
             </a:r>
@@ -16233,6 +16512,7 @@
                 <a:solidFill>
                   <a:srgbClr val="FFFFFF"/>
                 </a:solidFill>
+                <a:latin typeface="Franklin Gothic Medium Cond"/>
               </a:rPr>
               <a:t>▸  Use AI feedback to improve your own draft</a:t>
             </a:r>
@@ -16248,6 +16528,7 @@
                 <a:solidFill>
                   <a:srgbClr val="FFFFFF"/>
                 </a:solidFill>
+                <a:latin typeface="Franklin Gothic Medium Cond"/>
               </a:rPr>
               <a:t>▸  Ask AI questions to deepen understanding</a:t>
             </a:r>
@@ -16263,6 +16544,7 @@
                 <a:solidFill>
                   <a:srgbClr val="FFFFFF"/>
                 </a:solidFill>
+                <a:latin typeface="Franklin Gothic Medium Cond"/>
               </a:rPr>
               <a:t>▸  Use AI to explore multiple perspectives</a:t>
             </a:r>
@@ -16278,6 +16560,7 @@
                 <a:solidFill>
                   <a:srgbClr val="FFFFFF"/>
                 </a:solidFill>
+                <a:latin typeface="Franklin Gothic Medium Cond"/>
               </a:rPr>
               <a:t>▸  Cite AI assistance when required</a:t>
             </a:r>
@@ -16293,6 +16576,7 @@
                 <a:solidFill>
                   <a:srgbClr val="FFFFFF"/>
                 </a:solidFill>
+                <a:latin typeface="Franklin Gothic Medium Cond"/>
               </a:rPr>
               <a:t>▸  Reflect on what AI taught you</a:t>
             </a:r>
@@ -16314,7 +16598,7 @@
             <a:avLst/>
           </a:prstGeom>
           <a:solidFill>
-            <a:srgbClr val="E91E8C"/>
+            <a:srgbClr val="E28E03"/>
           </a:solidFill>
           <a:ln>
             <a:noFill/>
@@ -16370,6 +16654,7 @@
                 <a:solidFill>
                   <a:srgbClr val="FFFFFF"/>
                 </a:solidFill>
+                <a:latin typeface="Franklin Gothic Medium Cond"/>
               </a:rPr>
               <a:t>❌  Using AI as a SHORTCUT</a:t>
             </a:r>
@@ -16408,6 +16693,7 @@
                 <a:solidFill>
                   <a:srgbClr val="FFFFFF"/>
                 </a:solidFill>
+                <a:latin typeface="Franklin Gothic Medium Cond"/>
               </a:rPr>
               <a:t>▸  Submitting AI output without reading it</a:t>
             </a:r>
@@ -16423,6 +16709,7 @@
                 <a:solidFill>
                   <a:srgbClr val="FFFFFF"/>
                 </a:solidFill>
+                <a:latin typeface="Franklin Gothic Medium Cond"/>
               </a:rPr>
               <a:t>▸  Replacing your thinking with AI thinking</a:t>
             </a:r>
@@ -16438,6 +16725,7 @@
                 <a:solidFill>
                   <a:srgbClr val="FFFFFF"/>
                 </a:solidFill>
+                <a:latin typeface="Franklin Gothic Medium Cond"/>
               </a:rPr>
               <a:t>▸  Hiding your AI use from instructors</a:t>
             </a:r>
@@ -16453,6 +16741,7 @@
                 <a:solidFill>
                   <a:srgbClr val="FFFFFF"/>
                 </a:solidFill>
+                <a:latin typeface="Franklin Gothic Medium Cond"/>
               </a:rPr>
               <a:t>▸  Copying AI text and calling it your writing</a:t>
             </a:r>
@@ -16468,6 +16757,7 @@
                 <a:solidFill>
                   <a:srgbClr val="FFFFFF"/>
                 </a:solidFill>
+                <a:latin typeface="Franklin Gothic Medium Cond"/>
               </a:rPr>
               <a:t>▸  Using AI to avoid engaging with material</a:t>
             </a:r>
@@ -16483,6 +16773,7 @@
                 <a:solidFill>
                   <a:srgbClr val="FFFFFF"/>
                 </a:solidFill>
+                <a:latin typeface="Franklin Gothic Medium Cond"/>
               </a:rPr>
               <a:t>▸  Letting AI do the learning for you</a:t>
             </a:r>
@@ -16530,7 +16821,7 @@
             <a:avLst/>
           </a:prstGeom>
           <a:solidFill>
-            <a:srgbClr val="228BE6"/>
+            <a:srgbClr val="009DEA"/>
           </a:solidFill>
           <a:ln>
             <a:noFill/>
@@ -16586,6 +16877,7 @@
                 <a:solidFill>
                   <a:srgbClr val="FFFFFF"/>
                 </a:solidFill>
+                <a:latin typeface="Franklin Gothic Medium Cond"/>
               </a:rPr>
               <a:t>Basic AI Citation Expectations</a:t>
             </a:r>
@@ -16618,8 +16910,9 @@
             <a:r>
               <a:rPr sz="1800" b="0" i="1">
                 <a:solidFill>
-                  <a:srgbClr val="E8ECF8"/>
-                </a:solidFill>
+                  <a:srgbClr val="F0F4FA"/>
+                </a:solidFill>
+                <a:latin typeface="Franklin Gothic Medium Cond"/>
               </a:rPr>
               <a:t>When disclosure is required, cite clearly and completely</a:t>
             </a:r>
@@ -16656,8 +16949,9 @@
             <a:r>
               <a:rPr sz="2100">
                 <a:solidFill>
-                  <a:srgbClr val="444466"/>
-                </a:solidFill>
+                  <a:srgbClr val="0A3370"/>
+                </a:solidFill>
+                <a:latin typeface="Franklin Gothic Medium Cond"/>
               </a:rPr>
               <a:t>📎  Check your institution's style guide — many now include AI citation formats.</a:t>
             </a:r>
@@ -16671,8 +16965,9 @@
             <a:r>
               <a:rPr sz="2100">
                 <a:solidFill>
-                  <a:srgbClr val="444466"/>
-                </a:solidFill>
+                  <a:srgbClr val="0A3370"/>
+                </a:solidFill>
+                <a:latin typeface="Franklin Gothic Medium Cond"/>
               </a:rPr>
               <a:t>📎  APA 7:  OpenAI. (2024). ChatGPT (GPT-4) [Large language model]. https://chat.openai.com</a:t>
             </a:r>
@@ -16686,8 +16981,9 @@
             <a:r>
               <a:rPr sz="2100">
                 <a:solidFill>
-                  <a:srgbClr val="444466"/>
-                </a:solidFill>
+                  <a:srgbClr val="0A3370"/>
+                </a:solidFill>
+                <a:latin typeface="Franklin Gothic Medium Cond"/>
               </a:rPr>
               <a:t>📎  MLA:  'Prompt text.' ChatGPT, GPT-4 version, OpenAI, 15 Jan. 2024, chat.openai.com.</a:t>
             </a:r>
@@ -16701,8 +16997,9 @@
             <a:r>
               <a:rPr sz="2100">
                 <a:solidFill>
-                  <a:srgbClr val="444466"/>
-                </a:solidFill>
+                  <a:srgbClr val="0A3370"/>
+                </a:solidFill>
+                <a:latin typeface="Franklin Gothic Medium Cond"/>
               </a:rPr>
               <a:t>📎  Include: AI tool name  ·  Version  ·  Date of conversation  ·  Prompt used (if required)</a:t>
             </a:r>
@@ -16716,8 +17013,9 @@
             <a:r>
               <a:rPr sz="2100">
                 <a:solidFill>
-                  <a:srgbClr val="444466"/>
-                </a:solidFill>
+                  <a:srgbClr val="0A3370"/>
+                </a:solidFill>
+                <a:latin typeface="Franklin Gothic Medium Cond"/>
               </a:rPr>
               <a:t>📎  When in doubt, be transparent — disclose AI use in a brief author's note.</a:t>
             </a:r>
@@ -16731,8 +17029,9 @@
             <a:r>
               <a:rPr sz="2100">
                 <a:solidFill>
-                  <a:srgbClr val="444466"/>
-                </a:solidFill>
+                  <a:srgbClr val="0A3370"/>
+                </a:solidFill>
+                <a:latin typeface="Franklin Gothic Medium Cond"/>
               </a:rPr>
               <a:t>📎  Remember: citations show intellectual honesty, not weakness.</a:t>
             </a:r>
@@ -16753,7 +17052,7 @@
     <p:bg>
       <p:bgPr>
         <a:solidFill>
-          <a:srgbClr val="FF6D00"/>
+          <a:srgbClr val="E28E03"/>
         </a:solidFill>
         <a:effectLst/>
       </p:bgPr>
@@ -16793,6 +17092,7 @@
                 <a:solidFill>
                   <a:srgbClr val="FFFFFF"/>
                 </a:solidFill>
+                <a:latin typeface="Franklin Gothic Medium Cond"/>
               </a:rPr>
               <a:t>6</a:t>
             </a:r>
@@ -16814,7 +17114,7 @@
             <a:avLst/>
           </a:prstGeom>
           <a:solidFill>
-            <a:srgbClr val="FFD600"/>
+            <a:srgbClr val="FDB913"/>
           </a:solidFill>
           <a:ln>
             <a:noFill/>
@@ -16868,8 +17168,9 @@
             <a:r>
               <a:rPr sz="1800" b="1" i="1">
                 <a:solidFill>
-                  <a:srgbClr val="FFD600"/>
-                </a:solidFill>
+                  <a:srgbClr val="FDB913"/>
+                </a:solidFill>
+                <a:latin typeface="Franklin Gothic Medium Cond"/>
               </a:rPr>
               <a:t>SECTION 6</a:t>
             </a:r>
@@ -16904,6 +17205,7 @@
                 <a:solidFill>
                   <a:srgbClr val="FFFFFF"/>
                 </a:solidFill>
+                <a:latin typeface="Franklin Gothic Medium Cond"/>
               </a:rPr>
               <a:t>Final Prompting Challenge + Reflection</a:t>
             </a:r>
@@ -16936,8 +17238,9 @@
             <a:r>
               <a:rPr sz="2200" b="0" i="1">
                 <a:solidFill>
-                  <a:srgbClr val="E8ECF8"/>
-                </a:solidFill>
+                  <a:srgbClr val="F0F4FA"/>
+                </a:solidFill>
+                <a:latin typeface="Franklin Gothic Medium Cond"/>
               </a:rPr>
               <a:t>Put all 4 strategies together in one powerful prompt</a:t>
             </a:r>
@@ -16985,7 +17288,7 @@
             <a:avLst/>
           </a:prstGeom>
           <a:solidFill>
-            <a:srgbClr val="00BFA5"/>
+            <a:srgbClr val="0A3370"/>
           </a:solidFill>
           <a:ln>
             <a:noFill/>
@@ -17041,6 +17344,7 @@
                 <a:solidFill>
                   <a:srgbClr val="FFFFFF"/>
                 </a:solidFill>
+                <a:latin typeface="Franklin Gothic Medium Cond"/>
               </a:rPr>
               <a:t>Quiz Debrief</a:t>
             </a:r>
@@ -17073,8 +17377,9 @@
             <a:r>
               <a:rPr sz="1800" b="0" i="1">
                 <a:solidFill>
-                  <a:srgbClr val="FFD600"/>
-                </a:solidFill>
+                  <a:srgbClr val="FDB913"/>
+                </a:solidFill>
+                <a:latin typeface="Franklin Gothic Medium Cond"/>
               </a:rPr>
               <a:t>Let's talk about what we discovered</a:t>
             </a:r>
@@ -17096,7 +17401,7 @@
             <a:avLst/>
           </a:prstGeom>
           <a:solidFill>
-            <a:srgbClr val="E8ECF8"/>
+            <a:srgbClr val="F0F4FA"/>
           </a:solidFill>
           <a:ln>
             <a:noFill/>
@@ -17154,8 +17459,9 @@
             <a:r>
               <a:rPr sz="2100">
                 <a:solidFill>
-                  <a:srgbClr val="1A1A2E"/>
-                </a:solidFill>
+                  <a:srgbClr val="00244E"/>
+                </a:solidFill>
+                <a:latin typeface="Franklin Gothic Medium Cond"/>
               </a:rPr>
               <a:t>✅  Q1–Q3  |  AI Basics:  AI predicts language — it doesn't 'know' truth.</a:t>
             </a:r>
@@ -17169,8 +17475,9 @@
             <a:r>
               <a:rPr sz="2100">
                 <a:solidFill>
-                  <a:srgbClr val="1A1A2E"/>
-                </a:solidFill>
+                  <a:srgbClr val="00244E"/>
+                </a:solidFill>
+                <a:latin typeface="Franklin Gothic Medium Cond"/>
               </a:rPr>
               <a:t>✅  Q4–Q5  |  Mindset:  Specific, collaborative prompts get better results.</a:t>
             </a:r>
@@ -17184,8 +17491,9 @@
             <a:r>
               <a:rPr sz="2100">
                 <a:solidFill>
-                  <a:srgbClr val="1A1A2E"/>
-                </a:solidFill>
+                  <a:srgbClr val="00244E"/>
+                </a:solidFill>
+                <a:latin typeface="Franklin Gothic Medium Cond"/>
               </a:rPr>
               <a:t>✅  Q6–Q8  |  Prompting:  Role, format, and follow‑up questions improve AI output.</a:t>
             </a:r>
@@ -17199,8 +17507,9 @@
             <a:r>
               <a:rPr sz="2100">
                 <a:solidFill>
-                  <a:srgbClr val="1A1A2E"/>
-                </a:solidFill>
+                  <a:srgbClr val="00244E"/>
+                </a:solidFill>
+                <a:latin typeface="Franklin Gothic Medium Cond"/>
               </a:rPr>
               <a:t>✅  Q9–Q12 |  Responsible Use:  AI is a tool — how you use it is your choice.</a:t>
             </a:r>
@@ -17214,8 +17523,9 @@
             <a:r>
               <a:rPr sz="2100">
                 <a:solidFill>
-                  <a:srgbClr val="1A1A2E"/>
-                </a:solidFill>
+                  <a:srgbClr val="00244E"/>
+                </a:solidFill>
+                <a:latin typeface="Franklin Gothic Medium Cond"/>
               </a:rPr>
               <a:t/>
             </a:r>
@@ -17229,8 +17539,9 @@
             <a:r>
               <a:rPr sz="2100" b="1">
                 <a:solidFill>
-                  <a:srgbClr val="FF6D00"/>
-                </a:solidFill>
+                  <a:srgbClr val="E28E03"/>
+                </a:solidFill>
+                <a:latin typeface="Franklin Gothic Medium Cond"/>
               </a:rPr>
               <a:t>Key takeaway:</a:t>
             </a:r>
@@ -17244,8 +17555,9 @@
             <a:r>
               <a:rPr sz="2100" b="1">
                 <a:solidFill>
-                  <a:srgbClr val="6C35DE"/>
-                </a:solidFill>
+                  <a:srgbClr val="00244E"/>
+                </a:solidFill>
+                <a:latin typeface="Franklin Gothic Medium Cond"/>
               </a:rPr>
               <a:t>→  The goal of this workshop is to move from passive user to active collaborator.</a:t>
             </a:r>
@@ -17259,8 +17571,9 @@
             <a:r>
               <a:rPr sz="2100" b="1">
                 <a:solidFill>
-                  <a:srgbClr val="6C35DE"/>
-                </a:solidFill>
+                  <a:srgbClr val="00244E"/>
+                </a:solidFill>
+                <a:latin typeface="Franklin Gothic Medium Cond"/>
               </a:rPr>
               <a:t>→  Every strategy we practice today will make your AI interactions more powerful.</a:t>
             </a:r>
@@ -17308,7 +17621,7 @@
             <a:avLst/>
           </a:prstGeom>
           <a:solidFill>
-            <a:srgbClr val="FF6D00"/>
+            <a:srgbClr val="E28E03"/>
           </a:solidFill>
           <a:ln>
             <a:noFill/>
@@ -17364,6 +17677,7 @@
                 <a:solidFill>
                   <a:srgbClr val="FFFFFF"/>
                 </a:solidFill>
+                <a:latin typeface="Franklin Gothic Medium Cond"/>
               </a:rPr>
               <a:t>Build Your Best Prompt Challenge</a:t>
             </a:r>
@@ -17396,8 +17710,9 @@
             <a:r>
               <a:rPr sz="1800" b="0" i="1">
                 <a:solidFill>
-                  <a:srgbClr val="E8ECF8"/>
-                </a:solidFill>
+                  <a:srgbClr val="F0F4FA"/>
+                </a:solidFill>
+                <a:latin typeface="Franklin Gothic Medium Cond"/>
               </a:rPr>
               <a:t>Combine all 6 elements into one masterful prompt</a:t>
             </a:r>
@@ -17419,7 +17734,7 @@
             <a:avLst/>
           </a:prstGeom>
           <a:solidFill>
-            <a:srgbClr val="6C35DE"/>
+            <a:srgbClr val="00244E"/>
           </a:solidFill>
           <a:ln>
             <a:noFill/>
@@ -17475,6 +17790,7 @@
                 <a:solidFill>
                   <a:srgbClr val="FFFFFF"/>
                 </a:solidFill>
+                <a:latin typeface="Franklin Gothic Medium Cond"/>
               </a:rPr>
               <a:t>1</a:t>
             </a:r>
@@ -17509,6 +17825,7 @@
                 <a:solidFill>
                   <a:srgbClr val="FFFFFF"/>
                 </a:solidFill>
+                <a:latin typeface="Franklin Gothic Medium Cond"/>
               </a:rPr>
               <a:t>Role</a:t>
             </a:r>
@@ -17543,6 +17860,7 @@
                 <a:solidFill>
                   <a:srgbClr val="FFFFFF"/>
                 </a:solidFill>
+                <a:latin typeface="Franklin Gothic Medium Cond"/>
               </a:rPr>
               <a:t>Who should AI be?</a:t>
             </a:r>
@@ -17575,8 +17893,9 @@
             <a:r>
               <a:rPr sz="1400" b="1" i="0">
                 <a:solidFill>
-                  <a:srgbClr val="FFD600"/>
-                </a:solidFill>
+                  <a:srgbClr val="FDB913"/>
+                </a:solidFill>
+                <a:latin typeface="Franklin Gothic Medium Cond"/>
               </a:rPr>
               <a:t>Act as a …</a:t>
             </a:r>
@@ -17598,7 +17917,7 @@
             <a:avLst/>
           </a:prstGeom>
           <a:solidFill>
-            <a:srgbClr val="228BE6"/>
+            <a:srgbClr val="009DEA"/>
           </a:solidFill>
           <a:ln>
             <a:noFill/>
@@ -17654,6 +17973,7 @@
                 <a:solidFill>
                   <a:srgbClr val="FFFFFF"/>
                 </a:solidFill>
+                <a:latin typeface="Franklin Gothic Medium Cond"/>
               </a:rPr>
               <a:t>2</a:t>
             </a:r>
@@ -17688,6 +18008,7 @@
                 <a:solidFill>
                   <a:srgbClr val="FFFFFF"/>
                 </a:solidFill>
+                <a:latin typeface="Franklin Gothic Medium Cond"/>
               </a:rPr>
               <a:t>Context</a:t>
             </a:r>
@@ -17722,6 +18043,7 @@
                 <a:solidFill>
                   <a:srgbClr val="FFFFFF"/>
                 </a:solidFill>
+                <a:latin typeface="Franklin Gothic Medium Cond"/>
               </a:rPr>
               <a:t>What's the background?</a:t>
             </a:r>
@@ -17754,8 +18076,9 @@
             <a:r>
               <a:rPr sz="1400" b="1" i="0">
                 <a:solidFill>
-                  <a:srgbClr val="FFD600"/>
-                </a:solidFill>
+                  <a:srgbClr val="FDB913"/>
+                </a:solidFill>
+                <a:latin typeface="Franklin Gothic Medium Cond"/>
               </a:rPr>
               <a:t>I am a … working on …</a:t>
             </a:r>
@@ -17777,7 +18100,7 @@
             <a:avLst/>
           </a:prstGeom>
           <a:solidFill>
-            <a:srgbClr val="00BFA5"/>
+            <a:srgbClr val="0A3370"/>
           </a:solidFill>
           <a:ln>
             <a:noFill/>
@@ -17833,6 +18156,7 @@
                 <a:solidFill>
                   <a:srgbClr val="FFFFFF"/>
                 </a:solidFill>
+                <a:latin typeface="Franklin Gothic Medium Cond"/>
               </a:rPr>
               <a:t>3</a:t>
             </a:r>
@@ -17867,6 +18191,7 @@
                 <a:solidFill>
                   <a:srgbClr val="FFFFFF"/>
                 </a:solidFill>
+                <a:latin typeface="Franklin Gothic Medium Cond"/>
               </a:rPr>
               <a:t>Task</a:t>
             </a:r>
@@ -17901,6 +18226,7 @@
                 <a:solidFill>
                   <a:srgbClr val="FFFFFF"/>
                 </a:solidFill>
+                <a:latin typeface="Franklin Gothic Medium Cond"/>
               </a:rPr>
               <a:t>What exactly do you need?</a:t>
             </a:r>
@@ -17933,8 +18259,9 @@
             <a:r>
               <a:rPr sz="1400" b="1" i="0">
                 <a:solidFill>
-                  <a:srgbClr val="FFD600"/>
-                </a:solidFill>
+                  <a:srgbClr val="FDB913"/>
+                </a:solidFill>
+                <a:latin typeface="Franklin Gothic Medium Cond"/>
               </a:rPr>
               <a:t>Help me … by …</a:t>
             </a:r>
@@ -17956,7 +18283,7 @@
             <a:avLst/>
           </a:prstGeom>
           <a:solidFill>
-            <a:srgbClr val="FF6D00"/>
+            <a:srgbClr val="E28E03"/>
           </a:solidFill>
           <a:ln>
             <a:noFill/>
@@ -18012,6 +18339,7 @@
                 <a:solidFill>
                   <a:srgbClr val="FFFFFF"/>
                 </a:solidFill>
+                <a:latin typeface="Franklin Gothic Medium Cond"/>
               </a:rPr>
               <a:t>4</a:t>
             </a:r>
@@ -18046,6 +18374,7 @@
                 <a:solidFill>
                   <a:srgbClr val="FFFFFF"/>
                 </a:solidFill>
+                <a:latin typeface="Franklin Gothic Medium Cond"/>
               </a:rPr>
               <a:t>Constraints</a:t>
             </a:r>
@@ -18080,6 +18409,7 @@
                 <a:solidFill>
                   <a:srgbClr val="FFFFFF"/>
                 </a:solidFill>
+                <a:latin typeface="Franklin Gothic Medium Cond"/>
               </a:rPr>
               <a:t>What limits apply?</a:t>
             </a:r>
@@ -18112,8 +18442,9 @@
             <a:r>
               <a:rPr sz="1400" b="1" i="0">
                 <a:solidFill>
-                  <a:srgbClr val="FFD600"/>
-                </a:solidFill>
+                  <a:srgbClr val="FDB913"/>
+                </a:solidFill>
+                <a:latin typeface="Franklin Gothic Medium Cond"/>
               </a:rPr>
               <a:t>Keep it under … / Do not …</a:t>
             </a:r>
@@ -18135,7 +18466,7 @@
             <a:avLst/>
           </a:prstGeom>
           <a:solidFill>
-            <a:srgbClr val="E91E8C"/>
+            <a:srgbClr val="E28E03"/>
           </a:solidFill>
           <a:ln>
             <a:noFill/>
@@ -18191,6 +18522,7 @@
                 <a:solidFill>
                   <a:srgbClr val="FFFFFF"/>
                 </a:solidFill>
+                <a:latin typeface="Franklin Gothic Medium Cond"/>
               </a:rPr>
               <a:t>5</a:t>
             </a:r>
@@ -18225,6 +18557,7 @@
                 <a:solidFill>
                   <a:srgbClr val="FFFFFF"/>
                 </a:solidFill>
+                <a:latin typeface="Franklin Gothic Medium Cond"/>
               </a:rPr>
               <a:t>Output Format</a:t>
             </a:r>
@@ -18259,6 +18592,7 @@
                 <a:solidFill>
                   <a:srgbClr val="FFFFFF"/>
                 </a:solidFill>
+                <a:latin typeface="Franklin Gothic Medium Cond"/>
               </a:rPr>
               <a:t>How should the answer look?</a:t>
             </a:r>
@@ -18291,8 +18625,9 @@
             <a:r>
               <a:rPr sz="1400" b="1" i="0">
                 <a:solidFill>
-                  <a:srgbClr val="FFD600"/>
-                </a:solidFill>
+                  <a:srgbClr val="FDB913"/>
+                </a:solidFill>
+                <a:latin typeface="Franklin Gothic Medium Cond"/>
               </a:rPr>
               <a:t>Format as a table / checklist …</a:t>
             </a:r>
@@ -18314,7 +18649,7 @@
             <a:avLst/>
           </a:prstGeom>
           <a:solidFill>
-            <a:srgbClr val="00C853"/>
+            <a:srgbClr val="009DEA"/>
           </a:solidFill>
           <a:ln>
             <a:noFill/>
@@ -18370,6 +18705,7 @@
                 <a:solidFill>
                   <a:srgbClr val="FFFFFF"/>
                 </a:solidFill>
+                <a:latin typeface="Franklin Gothic Medium Cond"/>
               </a:rPr>
               <a:t>6</a:t>
             </a:r>
@@ -18404,6 +18740,7 @@
                 <a:solidFill>
                   <a:srgbClr val="FFFFFF"/>
                 </a:solidFill>
+                <a:latin typeface="Franklin Gothic Medium Cond"/>
               </a:rPr>
               <a:t>Language Level</a:t>
             </a:r>
@@ -18438,6 +18775,7 @@
                 <a:solidFill>
                   <a:srgbClr val="FFFFFF"/>
                 </a:solidFill>
+                <a:latin typeface="Franklin Gothic Medium Cond"/>
               </a:rPr>
               <a:t>What reading level / language?</a:t>
             </a:r>
@@ -18470,8 +18808,9 @@
             <a:r>
               <a:rPr sz="1400" b="1" i="0">
                 <a:solidFill>
-                  <a:srgbClr val="FFD600"/>
-                </a:solidFill>
+                  <a:srgbClr val="FDB913"/>
+                </a:solidFill>
+                <a:latin typeface="Franklin Gothic Medium Cond"/>
               </a:rPr>
               <a:t>Use B2 English / avoid jargon …</a:t>
             </a:r>
@@ -18519,7 +18858,7 @@
             <a:avLst/>
           </a:prstGeom>
           <a:solidFill>
-            <a:srgbClr val="FF6D00"/>
+            <a:srgbClr val="E28E03"/>
           </a:solidFill>
           <a:ln>
             <a:noFill/>
@@ -18575,6 +18914,7 @@
                 <a:solidFill>
                   <a:srgbClr val="FFFFFF"/>
                 </a:solidFill>
+                <a:latin typeface="Franklin Gothic Medium Cond"/>
               </a:rPr>
               <a:t>✏️  Activity: Build Your Best Prompt — Live Challenge</a:t>
             </a:r>
@@ -18609,6 +18949,7 @@
                 <a:solidFill>
                   <a:srgbClr val="FFFFFF"/>
                 </a:solidFill>
+                <a:latin typeface="Franklin Gothic Medium Cond"/>
               </a:rPr>
               <a:t>⏱  10 min</a:t>
             </a:r>
@@ -18630,7 +18971,7 @@
             <a:avLst/>
           </a:prstGeom>
           <a:solidFill>
-            <a:srgbClr val="E8ECF8"/>
+            <a:srgbClr val="F0F4FA"/>
           </a:solidFill>
           <a:ln>
             <a:noFill/>
@@ -18688,8 +19029,9 @@
             <a:r>
               <a:rPr sz="2100">
                 <a:solidFill>
-                  <a:srgbClr val="1A1A2E"/>
-                </a:solidFill>
+                  <a:srgbClr val="00244E"/>
+                </a:solidFill>
+                <a:latin typeface="Franklin Gothic Medium Cond"/>
               </a:rPr>
               <a:t>Choose a real task you need help with this week.</a:t>
             </a:r>
@@ -18703,8 +19045,9 @@
             <a:r>
               <a:rPr sz="2100">
                 <a:solidFill>
-                  <a:srgbClr val="1A1A2E"/>
-                </a:solidFill>
+                  <a:srgbClr val="00244E"/>
+                </a:solidFill>
+                <a:latin typeface="Franklin Gothic Medium Cond"/>
               </a:rPr>
               <a:t/>
             </a:r>
@@ -18718,8 +19061,9 @@
             <a:r>
               <a:rPr sz="2100">
                 <a:solidFill>
-                  <a:srgbClr val="1A1A2E"/>
-                </a:solidFill>
+                  <a:srgbClr val="00244E"/>
+                </a:solidFill>
+                <a:latin typeface="Franklin Gothic Medium Cond"/>
               </a:rPr>
               <a:t>Write ONE prompt that includes ALL 6 elements:</a:t>
             </a:r>
@@ -18733,8 +19077,9 @@
             <a:r>
               <a:rPr sz="2100" b="1">
                 <a:solidFill>
-                  <a:srgbClr val="6C35DE"/>
-                </a:solidFill>
+                  <a:srgbClr val="00244E"/>
+                </a:solidFill>
+                <a:latin typeface="Franklin Gothic Medium Cond"/>
               </a:rPr>
               <a:t>→  Role  |  Context  |  Task  |  Constraints  |  Output Format  |  Language Level</a:t>
             </a:r>
@@ -18748,8 +19093,9 @@
             <a:r>
               <a:rPr sz="2100">
                 <a:solidFill>
-                  <a:srgbClr val="1A1A2E"/>
-                </a:solidFill>
+                  <a:srgbClr val="00244E"/>
+                </a:solidFill>
+                <a:latin typeface="Franklin Gothic Medium Cond"/>
               </a:rPr>
               <a:t/>
             </a:r>
@@ -18763,8 +19109,9 @@
             <a:r>
               <a:rPr sz="2100">
                 <a:solidFill>
-                  <a:srgbClr val="1A1A2E"/>
-                </a:solidFill>
+                  <a:srgbClr val="00244E"/>
+                </a:solidFill>
+                <a:latin typeface="Franklin Gothic Medium Cond"/>
               </a:rPr>
               <a:t>Example master prompt:</a:t>
             </a:r>
@@ -18778,8 +19125,9 @@
             <a:r>
               <a:rPr sz="2100" b="1">
                 <a:solidFill>
-                  <a:srgbClr val="6C35DE"/>
-                </a:solidFill>
+                  <a:srgbClr val="00244E"/>
+                </a:solidFill>
+                <a:latin typeface="Franklin Gothic Medium Cond"/>
               </a:rPr>
               <a:t>→  'Act as a career counsellor [ROLE]. I am an international student in my final year studying Computer Science [CONTEXT]. Help me write a cover letter for a software internship at Google [TASK]. Keep it under 300 words and avoid clichés [CONSTRAINTS]. Format it as a professional letter [FORMAT]. Use clear, confident B2 English [LANGUAGE].'</a:t>
             </a:r>
@@ -18793,8 +19141,9 @@
             <a:r>
               <a:rPr sz="2100">
                 <a:solidFill>
-                  <a:srgbClr val="1A1A2E"/>
-                </a:solidFill>
+                  <a:srgbClr val="00244E"/>
+                </a:solidFill>
+                <a:latin typeface="Franklin Gothic Medium Cond"/>
               </a:rPr>
               <a:t/>
             </a:r>
@@ -18808,8 +19157,9 @@
             <a:r>
               <a:rPr sz="2100">
                 <a:solidFill>
-                  <a:srgbClr val="1A1A2E"/>
-                </a:solidFill>
+                  <a:srgbClr val="00244E"/>
+                </a:solidFill>
+                <a:latin typeface="Franklin Gothic Medium Cond"/>
               </a:rPr>
               <a:t>Share your prompt — class votes on the most complete one! 🏆</a:t>
             </a:r>
@@ -18857,7 +19207,7 @@
             <a:avLst/>
           </a:prstGeom>
           <a:solidFill>
-            <a:srgbClr val="6C35DE"/>
+            <a:srgbClr val="00244E"/>
           </a:solidFill>
           <a:ln>
             <a:noFill/>
@@ -18913,6 +19263,7 @@
                 <a:solidFill>
                   <a:srgbClr val="FFFFFF"/>
                 </a:solidFill>
+                <a:latin typeface="Franklin Gothic Medium Cond"/>
               </a:rPr>
               <a:t>Reflection: Mindset Shift &amp; Next Steps</a:t>
             </a:r>
@@ -18945,8 +19296,9 @@
             <a:r>
               <a:rPr sz="1800" b="0" i="1">
                 <a:solidFill>
-                  <a:srgbClr val="E8ECF8"/>
-                </a:solidFill>
+                  <a:srgbClr val="F0F4FA"/>
+                </a:solidFill>
+                <a:latin typeface="Franklin Gothic Medium Cond"/>
               </a:rPr>
               <a:t>Take 3 minutes to think — then share one insight</a:t>
             </a:r>
@@ -18968,7 +19320,7 @@
             <a:avLst/>
           </a:prstGeom>
           <a:solidFill>
-            <a:srgbClr val="E8ECF8"/>
+            <a:srgbClr val="F0F4FA"/>
           </a:solidFill>
           <a:ln>
             <a:noFill/>
@@ -19011,7 +19363,7 @@
             <a:avLst/>
           </a:prstGeom>
           <a:solidFill>
-            <a:srgbClr val="6C35DE"/>
+            <a:srgbClr val="00244E"/>
           </a:solidFill>
           <a:ln>
             <a:noFill/>
@@ -19067,6 +19419,7 @@
                 <a:solidFill>
                   <a:srgbClr val="FFFFFF"/>
                 </a:solidFill>
+                <a:latin typeface="Franklin Gothic Medium Cond"/>
               </a:rPr>
               <a:t>🔄  Mindset Shift</a:t>
             </a:r>
@@ -19100,6 +19453,7 @@
                 <a:solidFill>
                   <a:srgbClr val="FFFFFF"/>
                 </a:solidFill>
+                <a:latin typeface="Franklin Gothic Medium Cond"/>
               </a:rPr>
               <a:t>At the start of today, how did you think about AI? How has that changed?</a:t>
             </a:r>
@@ -19121,7 +19475,7 @@
             <a:avLst/>
           </a:prstGeom>
           <a:solidFill>
-            <a:srgbClr val="228BE6"/>
+            <a:srgbClr val="009DEA"/>
           </a:solidFill>
           <a:ln>
             <a:noFill/>
@@ -19177,6 +19531,7 @@
                 <a:solidFill>
                   <a:srgbClr val="FFFFFF"/>
                 </a:solidFill>
+                <a:latin typeface="Franklin Gothic Medium Cond"/>
               </a:rPr>
               <a:t>💡  Biggest Insight</a:t>
             </a:r>
@@ -19210,6 +19565,7 @@
                 <a:solidFill>
                   <a:srgbClr val="FFFFFF"/>
                 </a:solidFill>
+                <a:latin typeface="Franklin Gothic Medium Cond"/>
               </a:rPr>
               <a:t>What is the single most useful thing you learned in this workshop?</a:t>
             </a:r>
@@ -19231,7 +19587,7 @@
             <a:avLst/>
           </a:prstGeom>
           <a:solidFill>
-            <a:srgbClr val="00BFA5"/>
+            <a:srgbClr val="0A3370"/>
           </a:solidFill>
           <a:ln>
             <a:noFill/>
@@ -19287,6 +19643,7 @@
                 <a:solidFill>
                   <a:srgbClr val="FFFFFF"/>
                 </a:solidFill>
+                <a:latin typeface="Franklin Gothic Medium Cond"/>
               </a:rPr>
               <a:t>✏️  First Prompt</a:t>
             </a:r>
@@ -19320,6 +19677,7 @@
                 <a:solidFill>
                   <a:srgbClr val="FFFFFF"/>
                 </a:solidFill>
+                <a:latin typeface="Franklin Gothic Medium Cond"/>
               </a:rPr>
               <a:t>What is the first real prompt you will try using today's strategies?</a:t>
             </a:r>
@@ -19341,7 +19699,7 @@
             <a:avLst/>
           </a:prstGeom>
           <a:solidFill>
-            <a:srgbClr val="FF6D00"/>
+            <a:srgbClr val="E28E03"/>
           </a:solidFill>
           <a:ln>
             <a:noFill/>
@@ -19397,6 +19755,7 @@
                 <a:solidFill>
                   <a:srgbClr val="FFFFFF"/>
                 </a:solidFill>
+                <a:latin typeface="Franklin Gothic Medium Cond"/>
               </a:rPr>
               <a:t>⚠️  Responsible Use</a:t>
             </a:r>
@@ -19430,6 +19789,7 @@
                 <a:solidFill>
                   <a:srgbClr val="FFFFFF"/>
                 </a:solidFill>
+                <a:latin typeface="Franklin Gothic Medium Cond"/>
               </a:rPr>
               <a:t>What is one way you will use AI MORE responsibly going forward?</a:t>
             </a:r>
@@ -19451,7 +19811,7 @@
             <a:avLst/>
           </a:prstGeom>
           <a:solidFill>
-            <a:srgbClr val="E91E8C"/>
+            <a:srgbClr val="E28E03"/>
           </a:solidFill>
           <a:ln>
             <a:noFill/>
@@ -19507,6 +19867,7 @@
                 <a:solidFill>
                   <a:srgbClr val="FFFFFF"/>
                 </a:solidFill>
+                <a:latin typeface="Franklin Gothic Medium Cond"/>
               </a:rPr>
               <a:t>🚀  Next Step</a:t>
             </a:r>
@@ -19540,6 +19901,7 @@
                 <a:solidFill>
                   <a:srgbClr val="FFFFFF"/>
                 </a:solidFill>
+                <a:latin typeface="Franklin Gothic Medium Cond"/>
               </a:rPr>
               <a:t>What skill do you want to develop further — prompting, evaluation, or something else?</a:t>
             </a:r>
@@ -19560,7 +19922,7 @@
     <p:bg>
       <p:bgPr>
         <a:solidFill>
-          <a:srgbClr val="00BFA5"/>
+          <a:srgbClr val="0A3370"/>
         </a:solidFill>
         <a:effectLst/>
       </p:bgPr>
@@ -19600,6 +19962,7 @@
                 <a:solidFill>
                   <a:srgbClr val="FFFFFF"/>
                 </a:solidFill>
+                <a:latin typeface="Franklin Gothic Medium Cond"/>
               </a:rPr>
               <a:t>7</a:t>
             </a:r>
@@ -19621,7 +19984,7 @@
             <a:avLst/>
           </a:prstGeom>
           <a:solidFill>
-            <a:srgbClr val="FFD600"/>
+            <a:srgbClr val="FDB913"/>
           </a:solidFill>
           <a:ln>
             <a:noFill/>
@@ -19675,8 +20038,9 @@
             <a:r>
               <a:rPr sz="1800" b="1" i="1">
                 <a:solidFill>
-                  <a:srgbClr val="FFD600"/>
-                </a:solidFill>
+                  <a:srgbClr val="FDB913"/>
+                </a:solidFill>
+                <a:latin typeface="Franklin Gothic Medium Cond"/>
               </a:rPr>
               <a:t>SECTION 7</a:t>
             </a:r>
@@ -19711,6 +20075,7 @@
                 <a:solidFill>
                   <a:srgbClr val="FFFFFF"/>
                 </a:solidFill>
+                <a:latin typeface="Franklin Gothic Medium Cond"/>
               </a:rPr>
               <a:t>Closing &amp; Resources</a:t>
             </a:r>
@@ -19743,8 +20108,9 @@
             <a:r>
               <a:rPr sz="2200" b="0" i="1">
                 <a:solidFill>
-                  <a:srgbClr val="E8ECF8"/>
-                </a:solidFill>
+                  <a:srgbClr val="F0F4FA"/>
+                </a:solidFill>
+                <a:latin typeface="Franklin Gothic Medium Cond"/>
               </a:rPr>
               <a:t>Thank you — now go collaborate!</a:t>
             </a:r>
@@ -19765,7 +20131,7 @@
     <p:bg>
       <p:bgPr>
         <a:solidFill>
-          <a:srgbClr val="6C35DE"/>
+          <a:srgbClr val="00244E"/>
         </a:solidFill>
         <a:effectLst/>
       </p:bgPr>
@@ -19792,7 +20158,7 @@
             <a:avLst/>
           </a:prstGeom>
           <a:solidFill>
-            <a:srgbClr val="FFD600"/>
+            <a:srgbClr val="FDB913"/>
           </a:solidFill>
           <a:ln>
             <a:noFill/>
@@ -19835,7 +20201,7 @@
             <a:avLst/>
           </a:prstGeom>
           <a:solidFill>
-            <a:srgbClr val="6C35DE"/>
+            <a:srgbClr val="00244E"/>
           </a:solidFill>
           <a:ln>
             <a:noFill/>
@@ -19889,8 +20255,9 @@
             <a:r>
               <a:rPr sz="5200" b="1" i="0">
                 <a:solidFill>
-                  <a:srgbClr val="FFD600"/>
-                </a:solidFill>
+                  <a:srgbClr val="FDB913"/>
+                </a:solidFill>
+                <a:latin typeface="Franklin Gothic Medium Cond"/>
               </a:rPr>
               <a:t>Thank You!</a:t>
             </a:r>
@@ -19925,6 +20292,7 @@
                 <a:solidFill>
                   <a:srgbClr val="FFFFFF"/>
                 </a:solidFill>
+                <a:latin typeface="Franklin Gothic Medium Cond"/>
               </a:rPr>
               <a:t>You are now an AI collaborator — not just an AI user.</a:t>
             </a:r>
@@ -20000,8 +20368,9 @@
             <a:r>
               <a:rPr sz="2200" b="1" i="0">
                 <a:solidFill>
-                  <a:srgbClr val="FFD600"/>
-                </a:solidFill>
+                  <a:srgbClr val="FDB913"/>
+                </a:solidFill>
+                <a:latin typeface="Franklin Gothic Medium Cond"/>
               </a:rPr>
               <a:t>Resources &amp; Prompt Templates</a:t>
             </a:r>
@@ -20038,8 +20407,9 @@
             <a:r>
               <a:rPr sz="1600">
                 <a:solidFill>
-                  <a:srgbClr val="E8ECF8"/>
-                </a:solidFill>
+                  <a:srgbClr val="F0F4FA"/>
+                </a:solidFill>
+                <a:latin typeface="Franklin Gothic Medium Cond"/>
               </a:rPr>
               <a:t>🔗  ChatGPT: chat.openai.com         🔗  Claude: claude.ai</a:t>
             </a:r>
@@ -20053,8 +20423,9 @@
             <a:r>
               <a:rPr sz="1600">
                 <a:solidFill>
-                  <a:srgbClr val="E8ECF8"/>
-                </a:solidFill>
+                  <a:srgbClr val="F0F4FA"/>
+                </a:solidFill>
+                <a:latin typeface="Franklin Gothic Medium Cond"/>
               </a:rPr>
               <a:t>🔗  Gemini:  gemini.google.com        🔗  Copilot: copilot.microsoft.com</a:t>
             </a:r>
@@ -20068,8 +20439,9 @@
             <a:r>
               <a:rPr sz="1600">
                 <a:solidFill>
-                  <a:srgbClr val="E8ECF8"/>
-                </a:solidFill>
+                  <a:srgbClr val="F0F4FA"/>
+                </a:solidFill>
+                <a:latin typeface="Franklin Gothic Medium Cond"/>
               </a:rPr>
               <a:t/>
             </a:r>
@@ -20083,8 +20455,9 @@
             <a:r>
               <a:rPr sz="1600" b="1">
                 <a:solidFill>
-                  <a:srgbClr val="FFD600"/>
-                </a:solidFill>
+                  <a:srgbClr val="FDB913"/>
+                </a:solidFill>
+                <a:latin typeface="Franklin Gothic Medium Cond"/>
               </a:rPr>
               <a:t>📋  Master Prompt Template:</a:t>
             </a:r>
@@ -20098,8 +20471,9 @@
             <a:r>
               <a:rPr sz="1600" i="1">
                 <a:solidFill>
-                  <a:srgbClr val="E8ECF8"/>
-                </a:solidFill>
+                  <a:srgbClr val="F0F4FA"/>
+                </a:solidFill>
+                <a:latin typeface="Franklin Gothic Medium Cond"/>
               </a:rPr>
               <a:t>     'Act as [ROLE]. I am [CONTEXT]. Help me [TASK]. Keep [CONSTRAINTS]. Format as [FORMAT]. Use [LANGUAGE].'</a:t>
             </a:r>
@@ -20113,8 +20487,9 @@
             <a:r>
               <a:rPr sz="1600">
                 <a:solidFill>
-                  <a:srgbClr val="E8ECF8"/>
-                </a:solidFill>
+                  <a:srgbClr val="F0F4FA"/>
+                </a:solidFill>
+                <a:latin typeface="Franklin Gothic Medium Cond"/>
               </a:rPr>
               <a:t/>
             </a:r>
@@ -20128,8 +20503,9 @@
             <a:r>
               <a:rPr sz="1600" b="1">
                 <a:solidFill>
-                  <a:srgbClr val="FFD600"/>
-                </a:solidFill>
+                  <a:srgbClr val="FDB913"/>
+                </a:solidFill>
+                <a:latin typeface="Franklin Gothic Medium Cond"/>
               </a:rPr>
               <a:t>📚  Further Learning:  learnprompting.org  ·  elementsofai.com  ·  promptingguide.ai</a:t>
             </a:r>
@@ -20143,8 +20519,9 @@
             <a:r>
               <a:rPr sz="1600">
                 <a:solidFill>
-                  <a:srgbClr val="E8ECF8"/>
-                </a:solidFill>
+                  <a:srgbClr val="F0F4FA"/>
+                </a:solidFill>
+                <a:latin typeface="Franklin Gothic Medium Cond"/>
               </a:rPr>
               <a:t/>
             </a:r>
@@ -20158,8 +20535,9 @@
             <a:r>
               <a:rPr sz="1600">
                 <a:solidFill>
-                  <a:srgbClr val="E8ECF8"/>
-                </a:solidFill>
+                  <a:srgbClr val="F0F4FA"/>
+                </a:solidFill>
+                <a:latin typeface="Franklin Gothic Medium Cond"/>
               </a:rPr>
               <a:t>📧  Workshop Support:  [facilitator@institution.edu]</a:t>
             </a:r>
@@ -20173,8 +20551,9 @@
             <a:r>
               <a:rPr sz="1600">
                 <a:solidFill>
-                  <a:srgbClr val="E8ECF8"/>
-                </a:solidFill>
+                  <a:srgbClr val="F0F4FA"/>
+                </a:solidFill>
+                <a:latin typeface="Franklin Gothic Medium Cond"/>
               </a:rPr>
               <a:t>📞  Student Services:  [Your institution's student support contact]</a:t>
             </a:r>
@@ -20207,8 +20586,9 @@
             <a:r>
               <a:rPr sz="1500" b="0" i="1">
                 <a:solidFill>
-                  <a:srgbClr val="FFD600"/>
-                </a:solidFill>
+                  <a:srgbClr val="FDB913"/>
+                </a:solidFill>
+                <a:latin typeface="Franklin Gothic Medium Cond"/>
               </a:rPr>
               <a:t>Remember: The best prompt is the one that helps you think more clearly.</a:t>
             </a:r>
@@ -20229,7 +20609,7 @@
     <p:bg>
       <p:bgPr>
         <a:solidFill>
-          <a:srgbClr val="228BE6"/>
+          <a:srgbClr val="009DEA"/>
         </a:solidFill>
         <a:effectLst/>
       </p:bgPr>
@@ -20269,6 +20649,7 @@
                 <a:solidFill>
                   <a:srgbClr val="FFFFFF"/>
                 </a:solidFill>
+                <a:latin typeface="Franklin Gothic Medium Cond"/>
               </a:rPr>
               <a:t>1</a:t>
             </a:r>
@@ -20290,7 +20671,7 @@
             <a:avLst/>
           </a:prstGeom>
           <a:solidFill>
-            <a:srgbClr val="FFD600"/>
+            <a:srgbClr val="FDB913"/>
           </a:solidFill>
           <a:ln>
             <a:noFill/>
@@ -20344,8 +20725,9 @@
             <a:r>
               <a:rPr sz="1800" b="1" i="1">
                 <a:solidFill>
-                  <a:srgbClr val="FFD600"/>
-                </a:solidFill>
+                  <a:srgbClr val="FDB913"/>
+                </a:solidFill>
+                <a:latin typeface="Franklin Gothic Medium Cond"/>
               </a:rPr>
               <a:t>SECTION 1</a:t>
             </a:r>
@@ -20380,6 +20762,7 @@
                 <a:solidFill>
                   <a:srgbClr val="FFFFFF"/>
                 </a:solidFill>
+                <a:latin typeface="Franklin Gothic Medium Cond"/>
               </a:rPr>
               <a:t>Basics of AI</a:t>
             </a:r>
@@ -20412,8 +20795,9 @@
             <a:r>
               <a:rPr sz="2200" b="0" i="1">
                 <a:solidFill>
-                  <a:srgbClr val="E8ECF8"/>
-                </a:solidFill>
+                  <a:srgbClr val="F0F4FA"/>
+                </a:solidFill>
+                <a:latin typeface="Franklin Gothic Medium Cond"/>
               </a:rPr>
               <a:t>What it is, what it can do, and where it falls short</a:t>
             </a:r>
@@ -20461,7 +20845,7 @@
             <a:avLst/>
           </a:prstGeom>
           <a:solidFill>
-            <a:srgbClr val="228BE6"/>
+            <a:srgbClr val="009DEA"/>
           </a:solidFill>
           <a:ln>
             <a:noFill/>
@@ -20517,6 +20901,7 @@
                 <a:solidFill>
                   <a:srgbClr val="FFFFFF"/>
                 </a:solidFill>
+                <a:latin typeface="Franklin Gothic Medium Cond"/>
               </a:rPr>
               <a:t>What Is AI?</a:t>
             </a:r>
@@ -20549,8 +20934,9 @@
             <a:r>
               <a:rPr sz="1800" b="0" i="1">
                 <a:solidFill>
-                  <a:srgbClr val="E8ECF8"/>
-                </a:solidFill>
+                  <a:srgbClr val="F0F4FA"/>
+                </a:solidFill>
+                <a:latin typeface="Franklin Gothic Medium Cond"/>
               </a:rPr>
               <a:t>A simple explanation for everyday use</a:t>
             </a:r>
@@ -20572,7 +20958,7 @@
             <a:avLst/>
           </a:prstGeom>
           <a:solidFill>
-            <a:srgbClr val="228BE6"/>
+            <a:srgbClr val="009DEA"/>
           </a:solidFill>
           <a:ln>
             <a:noFill/>
@@ -20628,6 +21014,7 @@
                 <a:solidFill>
                   <a:srgbClr val="FFFFFF"/>
                 </a:solidFill>
+                <a:latin typeface="Franklin Gothic Medium Cond"/>
               </a:rPr>
               <a:t>🔍 Pattern Recognition</a:t>
             </a:r>
@@ -20704,6 +21091,7 @@
                 <a:solidFill>
                   <a:srgbClr val="FFFFFF"/>
                 </a:solidFill>
+                <a:latin typeface="Franklin Gothic Medium Cond"/>
               </a:rPr>
               <a:t>AI learns by finding patterns in enormous amounts of text, images, and data. It does not 'think' — it matches patterns.</a:t>
             </a:r>
@@ -20725,7 +21113,7 @@
             <a:avLst/>
           </a:prstGeom>
           <a:solidFill>
-            <a:srgbClr val="6C35DE"/>
+            <a:srgbClr val="00244E"/>
           </a:solidFill>
           <a:ln>
             <a:noFill/>
@@ -20781,6 +21169,7 @@
                 <a:solidFill>
                   <a:srgbClr val="FFFFFF"/>
                 </a:solidFill>
+                <a:latin typeface="Franklin Gothic Medium Cond"/>
               </a:rPr>
               <a:t>💬 Language Generation</a:t>
             </a:r>
@@ -20857,6 +21246,7 @@
                 <a:solidFill>
                   <a:srgbClr val="FFFFFF"/>
                 </a:solidFill>
+                <a:latin typeface="Franklin Gothic Medium Cond"/>
               </a:rPr>
               <a:t>AI chatbots predict the most likely next word — like autocomplete on a massive scale. Each word is chosen statistically.</a:t>
             </a:r>
@@ -20878,7 +21268,7 @@
             <a:avLst/>
           </a:prstGeom>
           <a:solidFill>
-            <a:srgbClr val="E91E8C"/>
+            <a:srgbClr val="E28E03"/>
           </a:solidFill>
           <a:ln>
             <a:noFill/>
@@ -20934,6 +21324,7 @@
                 <a:solidFill>
                   <a:srgbClr val="FFFFFF"/>
                 </a:solidFill>
+                <a:latin typeface="Franklin Gothic Medium Cond"/>
               </a:rPr>
               <a:t>🚫 No Understanding</a:t>
             </a:r>
@@ -21010,6 +21401,7 @@
                 <a:solidFill>
                   <a:srgbClr val="FFFFFF"/>
                 </a:solidFill>
+                <a:latin typeface="Franklin Gothic Medium Cond"/>
               </a:rPr>
               <a:t>AI does not truly 'know' things. It has no beliefs, no memory between sessions (by default), and no lived experience.</a:t>
             </a:r>
@@ -21042,8 +21434,9 @@
             <a:r>
               <a:rPr sz="1500" b="0" i="1">
                 <a:solidFill>
-                  <a:srgbClr val="228BE6"/>
-                </a:solidFill>
+                  <a:srgbClr val="009DEA"/>
+                </a:solidFill>
+                <a:latin typeface="Franklin Gothic Medium Cond"/>
               </a:rPr>
               <a:t>🔍  Analogy: AI is like very well-read autocomplete — not a search engine, not a brain.</a:t>
             </a:r>
@@ -21091,7 +21484,7 @@
             <a:avLst/>
           </a:prstGeom>
           <a:solidFill>
-            <a:srgbClr val="00BFA5"/>
+            <a:srgbClr val="0A3370"/>
           </a:solidFill>
           <a:ln>
             <a:noFill/>
@@ -21147,6 +21540,7 @@
                 <a:solidFill>
                   <a:srgbClr val="FFFFFF"/>
                 </a:solidFill>
+                <a:latin typeface="Franklin Gothic Medium Cond"/>
               </a:rPr>
               <a:t>What AI Can Do</a:t>
             </a:r>
@@ -21179,8 +21573,9 @@
             <a:r>
               <a:rPr sz="1800" b="0" i="1">
                 <a:solidFill>
-                  <a:srgbClr val="E8ECF8"/>
-                </a:solidFill>
+                  <a:srgbClr val="F0F4FA"/>
+                </a:solidFill>
+                <a:latin typeface="Franklin Gothic Medium Cond"/>
               </a:rPr>
               <a:t>Tasks where AI adds genuine value</a:t>
             </a:r>
@@ -21217,8 +21612,9 @@
             <a:r>
               <a:rPr sz="2100">
                 <a:solidFill>
-                  <a:srgbClr val="00BFA5"/>
-                </a:solidFill>
+                  <a:srgbClr val="0A3370"/>
+                </a:solidFill>
+                <a:latin typeface="Franklin Gothic Medium Cond"/>
               </a:rPr>
               <a:t>✓  Summarise long documents into key points</a:t>
             </a:r>
@@ -21232,8 +21628,9 @@
             <a:r>
               <a:rPr sz="2100">
                 <a:solidFill>
-                  <a:srgbClr val="00BFA5"/>
-                </a:solidFill>
+                  <a:srgbClr val="0A3370"/>
+                </a:solidFill>
+                <a:latin typeface="Franklin Gothic Medium Cond"/>
               </a:rPr>
               <a:t>✓  Translate text between languages (with imperfect nuance)</a:t>
             </a:r>
@@ -21247,8 +21644,9 @@
             <a:r>
               <a:rPr sz="2100">
                 <a:solidFill>
-                  <a:srgbClr val="00BFA5"/>
-                </a:solidFill>
+                  <a:srgbClr val="0A3370"/>
+                </a:solidFill>
+                <a:latin typeface="Franklin Gothic Medium Cond"/>
               </a:rPr>
               <a:t>✓  Help plan projects, essays, or schedules</a:t>
             </a:r>
@@ -21262,8 +21660,9 @@
             <a:r>
               <a:rPr sz="2100">
                 <a:solidFill>
-                  <a:srgbClr val="00BFA5"/>
-                </a:solidFill>
+                  <a:srgbClr val="0A3370"/>
+                </a:solidFill>
+                <a:latin typeface="Franklin Gothic Medium Cond"/>
               </a:rPr>
               <a:t>✓  Brainstorm ideas, names, titles, and arguments</a:t>
             </a:r>
@@ -21277,8 +21676,9 @@
             <a:r>
               <a:rPr sz="2100">
                 <a:solidFill>
-                  <a:srgbClr val="00BFA5"/>
-                </a:solidFill>
+                  <a:srgbClr val="0A3370"/>
+                </a:solidFill>
+                <a:latin typeface="Franklin Gothic Medium Cond"/>
               </a:rPr>
               <a:t>✓  Generate templates: emails, outlines, cover letters</a:t>
             </a:r>
@@ -21292,8 +21692,9 @@
             <a:r>
               <a:rPr sz="2100">
                 <a:solidFill>
-                  <a:srgbClr val="00BFA5"/>
-                </a:solidFill>
+                  <a:srgbClr val="0A3370"/>
+                </a:solidFill>
+                <a:latin typeface="Franklin Gothic Medium Cond"/>
               </a:rPr>
               <a:t>✓  Explain complex topics in simpler language</a:t>
             </a:r>
@@ -21307,8 +21708,9 @@
             <a:r>
               <a:rPr sz="2100">
                 <a:solidFill>
-                  <a:srgbClr val="00BFA5"/>
-                </a:solidFill>
+                  <a:srgbClr val="0A3370"/>
+                </a:solidFill>
+                <a:latin typeface="Franklin Gothic Medium Cond"/>
               </a:rPr>
               <a:t>✓  Give feedback on writing drafts</a:t>
             </a:r>
@@ -21322,8 +21724,9 @@
             <a:r>
               <a:rPr sz="2100">
                 <a:solidFill>
-                  <a:srgbClr val="00BFA5"/>
-                </a:solidFill>
+                  <a:srgbClr val="0A3370"/>
+                </a:solidFill>
+                <a:latin typeface="Franklin Gothic Medium Cond"/>
               </a:rPr>
               <a:t>✓  Answer general knowledge questions (with caveats)</a:t>
             </a:r>
@@ -21371,7 +21774,7 @@
             <a:avLst/>
           </a:prstGeom>
           <a:solidFill>
-            <a:srgbClr val="E91E8C"/>
+            <a:srgbClr val="E28E03"/>
           </a:solidFill>
           <a:ln>
             <a:noFill/>
@@ -21427,6 +21830,7 @@
                 <a:solidFill>
                   <a:srgbClr val="FFFFFF"/>
                 </a:solidFill>
+                <a:latin typeface="Franklin Gothic Medium Cond"/>
               </a:rPr>
               <a:t>What AI Cannot Do</a:t>
             </a:r>
@@ -21459,8 +21863,9 @@
             <a:r>
               <a:rPr sz="1800" b="0" i="1">
                 <a:solidFill>
-                  <a:srgbClr val="E8ECF8"/>
-                </a:solidFill>
+                  <a:srgbClr val="F0F4FA"/>
+                </a:solidFill>
+                <a:latin typeface="Franklin Gothic Medium Cond"/>
               </a:rPr>
               <a:t>Critical limitations every user must know</a:t>
             </a:r>
@@ -21497,8 +21902,9 @@
             <a:r>
               <a:rPr sz="2100">
                 <a:solidFill>
-                  <a:srgbClr val="E91E8C"/>
-                </a:solidFill>
+                  <a:srgbClr val="E28E03"/>
+                </a:solidFill>
+                <a:latin typeface="Franklin Gothic Medium Cond"/>
               </a:rPr>
               <a:t>✗  Know the truth — AI can confidently state false information ('hallucinations')</a:t>
             </a:r>
@@ -21512,8 +21918,9 @@
             <a:r>
               <a:rPr sz="2100">
                 <a:solidFill>
-                  <a:srgbClr val="E91E8C"/>
-                </a:solidFill>
+                  <a:srgbClr val="E28E03"/>
+                </a:solidFill>
+                <a:latin typeface="Franklin Gothic Medium Cond"/>
               </a:rPr>
               <a:t>✗  Be perfectly accurate — always verify important facts from primary sources</a:t>
             </a:r>
@@ -21527,8 +21934,9 @@
             <a:r>
               <a:rPr sz="2100">
                 <a:solidFill>
-                  <a:srgbClr val="E91E8C"/>
-                </a:solidFill>
+                  <a:srgbClr val="E28E03"/>
+                </a:solidFill>
+                <a:latin typeface="Franklin Gothic Medium Cond"/>
               </a:rPr>
               <a:t>✗  Replace your judgment — AI has no understanding of your unique situation</a:t>
             </a:r>
@@ -21542,8 +21950,9 @@
             <a:r>
               <a:rPr sz="2100">
                 <a:solidFill>
-                  <a:srgbClr val="E91E8C"/>
-                </a:solidFill>
+                  <a:srgbClr val="E28E03"/>
+                </a:solidFill>
+                <a:latin typeface="Franklin Gothic Medium Cond"/>
               </a:rPr>
               <a:t>✗  Understand cultural nuance, humor, sarcasm, or local context reliably</a:t>
             </a:r>
@@ -21557,8 +21966,9 @@
             <a:r>
               <a:rPr sz="2100">
                 <a:solidFill>
-                  <a:srgbClr val="E91E8C"/>
-                </a:solidFill>
+                  <a:srgbClr val="E28E03"/>
+                </a:solidFill>
+                <a:latin typeface="Franklin Gothic Medium Cond"/>
               </a:rPr>
               <a:t>✗  Access live information (unless given web search tools explicitly)</a:t>
             </a:r>
@@ -21572,8 +21982,9 @@
             <a:r>
               <a:rPr sz="2100">
                 <a:solidFill>
-                  <a:srgbClr val="E91E8C"/>
-                </a:solidFill>
+                  <a:srgbClr val="E28E03"/>
+                </a:solidFill>
+                <a:latin typeface="Franklin Gothic Medium Cond"/>
               </a:rPr>
               <a:t>✗  Remember previous conversations (by default)</a:t>
             </a:r>
@@ -21587,8 +21998,9 @@
             <a:r>
               <a:rPr sz="2100">
                 <a:solidFill>
-                  <a:srgbClr val="E91E8C"/>
-                </a:solidFill>
+                  <a:srgbClr val="E28E03"/>
+                </a:solidFill>
+                <a:latin typeface="Franklin Gothic Medium Cond"/>
               </a:rPr>
               <a:t>✗  Think creatively — it recombines existing patterns, not novel ideas</a:t>
             </a:r>
@@ -21636,7 +22048,7 @@
             <a:avLst/>
           </a:prstGeom>
           <a:solidFill>
-            <a:srgbClr val="FF6D00"/>
+            <a:srgbClr val="E28E03"/>
           </a:solidFill>
           <a:ln>
             <a:noFill/>
@@ -21692,6 +22104,7 @@
                 <a:solidFill>
                   <a:srgbClr val="FFFFFF"/>
                 </a:solidFill>
+                <a:latin typeface="Franklin Gothic Medium Cond"/>
               </a:rPr>
               <a:t>Why AI Makes Mistakes</a:t>
             </a:r>
@@ -21724,8 +22137,9 @@
             <a:r>
               <a:rPr sz="1800" b="0" i="1">
                 <a:solidFill>
-                  <a:srgbClr val="E8ECF8"/>
-                </a:solidFill>
+                  <a:srgbClr val="F0F4FA"/>
+                </a:solidFill>
+                <a:latin typeface="Franklin Gothic Medium Cond"/>
               </a:rPr>
               <a:t>Understanding this makes you a smarter user</a:t>
             </a:r>
@@ -21747,7 +22161,7 @@
             <a:avLst/>
           </a:prstGeom>
           <a:solidFill>
-            <a:srgbClr val="E91E8C"/>
+            <a:srgbClr val="E28E03"/>
           </a:solidFill>
           <a:ln>
             <a:noFill/>
@@ -21803,6 +22217,7 @@
                 <a:solidFill>
                   <a:srgbClr val="FFFFFF"/>
                 </a:solidFill>
+                <a:latin typeface="Franklin Gothic Medium Cond"/>
               </a:rPr>
               <a:t>💭 Hallucinations</a:t>
             </a:r>
@@ -21836,6 +22251,7 @@
                 <a:solidFill>
                   <a:srgbClr val="FFFFFF"/>
                 </a:solidFill>
+                <a:latin typeface="Franklin Gothic Medium Cond"/>
               </a:rPr>
               <a:t>AI sometimes generates plausible-sounding but completely false information — including fake citations, statistics, or events.</a:t>
             </a:r>
@@ -21857,7 +22273,7 @@
             <a:avLst/>
           </a:prstGeom>
           <a:solidFill>
-            <a:srgbClr val="FF6D00"/>
+            <a:srgbClr val="E28E03"/>
           </a:solidFill>
           <a:ln>
             <a:noFill/>
@@ -21913,6 +22329,7 @@
                 <a:solidFill>
                   <a:srgbClr val="FFFFFF"/>
                 </a:solidFill>
+                <a:latin typeface="Franklin Gothic Medium Cond"/>
               </a:rPr>
               <a:t>⚖️ Bias in Training Data</a:t>
             </a:r>
@@ -21946,6 +22363,7 @@
                 <a:solidFill>
                   <a:srgbClr val="FFFFFF"/>
                 </a:solidFill>
+                <a:latin typeface="Franklin Gothic Medium Cond"/>
               </a:rPr>
               <a:t>AI learns from internet text, which reflects human biases around gender, race, culture, and language. These biases can appear in outputs.</a:t>
             </a:r>
@@ -21967,7 +22385,7 @@
             <a:avLst/>
           </a:prstGeom>
           <a:solidFill>
-            <a:srgbClr val="228BE6"/>
+            <a:srgbClr val="009DEA"/>
           </a:solidFill>
           <a:ln>
             <a:noFill/>
@@ -22023,6 +22441,7 @@
                 <a:solidFill>
                   <a:srgbClr val="FFFFFF"/>
                 </a:solidFill>
+                <a:latin typeface="Franklin Gothic Medium Cond"/>
               </a:rPr>
               <a:t>❓ Missing Context</a:t>
             </a:r>
@@ -22056,6 +22475,7 @@
                 <a:solidFill>
                   <a:srgbClr val="FFFFFF"/>
                 </a:solidFill>
+                <a:latin typeface="Franklin Gothic Medium Cond"/>
               </a:rPr>
               <a:t>Without enough context from you, AI fills gaps with assumptions — which may not match your actual situation or needs.</a:t>
             </a:r>
@@ -22077,7 +22497,7 @@
             <a:avLst/>
           </a:prstGeom>
           <a:solidFill>
-            <a:srgbClr val="6C35DE"/>
+            <a:srgbClr val="00244E"/>
           </a:solidFill>
           <a:ln>
             <a:noFill/>
@@ -22133,6 +22553,7 @@
                 <a:solidFill>
                   <a:srgbClr val="FFFFFF"/>
                 </a:solidFill>
+                <a:latin typeface="Franklin Gothic Medium Cond"/>
               </a:rPr>
               <a:t>📅 Outdated Training Data</a:t>
             </a:r>
@@ -22166,6 +22587,7 @@
                 <a:solidFill>
                   <a:srgbClr val="FFFFFF"/>
                 </a:solidFill>
+                <a:latin typeface="Franklin Gothic Medium Cond"/>
               </a:rPr>
               <a:t>Most AI models have a knowledge cutoff. Events, research, or policies after that date may not be reflected in responses.</a:t>
             </a:r>
